--- a/docs/PRESENTACION_PROYECTO_CRISP_DM.pptx
+++ b/docs/PRESENTACION_PROYECTO_CRISP_DM.pptx
@@ -3110,7 +3110,7 @@
             <a:avLst/>
           </a:prstGeom>
           <a:solidFill>
-            <a:srgbClr val="0B0F19"/>
+            <a:srgbClr val="0A0E17"/>
           </a:solidFill>
           <a:ln>
             <a:noFill/>
@@ -3146,16 +3146,16 @@
         </p:nvSpPr>
         <p:spPr>
           <a:xfrm>
-            <a:off x="1371600" y="1097280"/>
-            <a:ext cx="9448495" cy="4663440"/>
+            <a:off x="1097280" y="914400"/>
+            <a:ext cx="9997135" cy="5029200"/>
           </a:xfrm>
           <a:prstGeom prst="roundRect">
             <a:avLst/>
           </a:prstGeom>
           <a:solidFill>
-            <a:srgbClr val="181F2E"/>
+            <a:srgbClr val="161E2E"/>
           </a:solidFill>
-          <a:ln w="12700">
+          <a:ln w="19050">
             <a:solidFill>
               <a:srgbClr val="38BDF8"/>
             </a:solidFill>
@@ -3191,8 +3191,8 @@
         </p:nvSpPr>
         <p:spPr>
           <a:xfrm>
-            <a:off x="1828800" y="1463040"/>
-            <a:ext cx="8534095" cy="3931920"/>
+            <a:off x="1463040" y="1371600"/>
+            <a:ext cx="9265615" cy="4114800"/>
           </a:xfrm>
           <a:prstGeom prst="rect">
             <a:avLst/>
@@ -3207,61 +3207,69 @@
           <a:p>
             <a:pPr algn="ctr"/>
             <a:r>
-              <a:rPr sz="2600" b="1">
+              <a:rPr sz="3400" b="1">
                 <a:solidFill>
                   <a:srgbClr val="38BDF8"/>
                 </a:solidFill>
               </a:rPr>
-              <a:t>PROYECTO FINAL: MINERÍA DE DATOS (IEI-067)
+              <a:t>MINERÍA DE DATOS CON CRISP-DM
 </a:t>
             </a:r>
           </a:p>
           <a:p>
-            <a:pPr algn="ctr"/>
-            <a:r>
-              <a:rPr sz="1600" b="1">
-                <a:solidFill>
-                  <a:srgbClr val="F8FAFC"/>
-                </a:solidFill>
-              </a:rPr>
-              <a:t>Metodología CRISP-DM Aplicada al Streaming Musical (Spotify 2015–2025)
+            <a:pPr algn="ctr">
+              <a:spcBef>
+                <a:spcPts val="800"/>
+              </a:spcBef>
+            </a:pPr>
+            <a:r>
+              <a:rPr sz="2000" b="1">
+                <a:solidFill>
+                  <a:srgbClr val="FFFFFF"/>
+                </a:solidFill>
+              </a:rPr>
+              <a:t>SoundData Analytics: Segmentación y Predicción de Éxito Musical
 </a:t>
             </a:r>
           </a:p>
           <a:p>
-            <a:pPr algn="ctr"/>
-            <a:r>
-              <a:rPr sz="1200" b="0">
-                <a:solidFill>
-                  <a:srgbClr val="94A3B8"/>
-                </a:solidFill>
-              </a:rPr>
-              <a:t>Modelado de Clasificación, Clustering de Audiencias y Reglas de Asociación
+            <a:pPr algn="ctr">
+              <a:spcBef>
+                <a:spcPts val="1600"/>
+              </a:spcBef>
+            </a:pPr>
+            <a:r>
+              <a:rPr sz="1500" b="1">
+                <a:solidFill>
+                  <a:srgbClr val="10B981"/>
+                </a:solidFill>
+              </a:rPr>
+              <a:t>Catálogo de 85.000 Canciones de Spotify (2015–2025)
 </a:t>
             </a:r>
           </a:p>
           <a:p>
-            <a:pPr algn="ctr"/>
-            <a:r>
-              <a:rPr sz="1100" b="0">
-                <a:solidFill>
-                  <a:srgbClr val="F8FAFC"/>
+            <a:pPr algn="ctr">
+              <a:spcBef>
+                <a:spcPts val="2800"/>
+              </a:spcBef>
+            </a:pPr>
+            <a:r>
+              <a:rPr sz="1250" b="0">
+                <a:solidFill>
+                  <a:srgbClr val="CBD5E1"/>
                 </a:solidFill>
               </a:rPr>
               <a:t>Grupo 4: Vicente Muñoz • Juan Ortiz • Jordan Murillo • Jorge Moncada • Jose Mendez • Bastian Parraguez
 </a:t>
             </a:r>
-          </a:p>
-          <a:p>
-            <a:pPr algn="ctr"/>
-            <a:r>
-              <a:rPr sz="1000" b="0">
-                <a:solidFill>
-                  <a:srgbClr val="1DB954"/>
-                </a:solidFill>
-              </a:rPr>
-              <a:t>Universidad Santo Tomás — Docentes: Florentino Vargas &amp; Rosa Rao
-Octubre de 2026</a:t>
+            <a:r>
+              <a:rPr sz="1150" b="0">
+                <a:solidFill>
+                  <a:srgbClr val="94A3B8"/>
+                </a:solidFill>
+              </a:rPr>
+              <a:t>Docentes Guía: Florentino Vargas &amp; Rosa Rao  |  Universidad Santo Tomás</a:t>
             </a:r>
           </a:p>
         </p:txBody>
@@ -3299,7 +3307,7 @@
             <a:avLst/>
           </a:prstGeom>
           <a:solidFill>
-            <a:srgbClr val="0B0F19"/>
+            <a:srgbClr val="0A0E17"/>
           </a:solidFill>
           <a:ln>
             <a:noFill/>
@@ -3350,9 +3358,9 @@
           <a:lstStyle/>
           <a:p>
             <a:r>
-              <a:rPr sz="1000" b="1">
-                <a:solidFill>
-                  <a:srgbClr val="1DB954"/>
+              <a:rPr sz="1100" b="1">
+                <a:solidFill>
+                  <a:srgbClr val="38BDF8"/>
                 </a:solidFill>
               </a:rPr>
               <a:t>CRISP-DM — FASES 1 &amp; 2</a:t>
@@ -3369,7 +3377,7 @@
         <p:spPr>
           <a:xfrm>
             <a:off x="731520" y="640080"/>
-            <a:ext cx="10698480" cy="640080"/>
+            <a:ext cx="10698480" cy="731520"/>
           </a:xfrm>
           <a:prstGeom prst="rect">
             <a:avLst/>
@@ -3383,12 +3391,12 @@
           <a:lstStyle/>
           <a:p>
             <a:r>
-              <a:rPr sz="2200" b="1">
-                <a:solidFill>
-                  <a:srgbClr val="F8FAFC"/>
-                </a:solidFill>
-              </a:rPr>
-              <a:t>Fases 1 y 2: Comprensión del Negocio y Análisis Exploratorio (EDA)</a:t>
+              <a:rPr sz="2500" b="1">
+                <a:solidFill>
+                  <a:srgbClr val="FFFFFF"/>
+                </a:solidFill>
+              </a:rPr>
+              <a:t>Fases 1 y 2: Negocio y Comprensión de los Datos</a:t>
             </a:r>
           </a:p>
         </p:txBody>
@@ -3401,18 +3409,18 @@
         </p:nvSpPr>
         <p:spPr>
           <a:xfrm>
-            <a:off x="731520" y="1371600"/>
-            <a:ext cx="4754880" cy="4937760"/>
+            <a:off x="731520" y="1463040"/>
+            <a:ext cx="6949440" cy="4846320"/>
           </a:xfrm>
           <a:prstGeom prst="roundRect">
             <a:avLst/>
           </a:prstGeom>
           <a:solidFill>
-            <a:srgbClr val="181F2E"/>
+            <a:srgbClr val="161E2E"/>
           </a:solidFill>
-          <a:ln w="12700">
+          <a:ln w="19050">
             <a:solidFill>
-              <a:srgbClr val="263047"/>
+              <a:srgbClr val="2E3D59"/>
             </a:solidFill>
           </a:ln>
         </p:spPr>
@@ -3438,180 +3446,9 @@
           </a:p>
         </p:txBody>
       </p:sp>
-      <p:sp>
-        <p:nvSpPr>
-          <p:cNvPr id="6" name="TextBox 5"/>
-          <p:cNvSpPr txBox="1"/>
-          <p:nvPr/>
-        </p:nvSpPr>
-        <p:spPr>
-          <a:xfrm>
-            <a:off x="914400" y="1554480"/>
-            <a:ext cx="4389120" cy="4572000"/>
-          </a:xfrm>
-          <a:prstGeom prst="rect">
-            <a:avLst/>
-          </a:prstGeom>
-          <a:noFill/>
-        </p:spPr>
-        <p:txBody>
-          <a:bodyPr wrap="square">
-            <a:spAutoFit/>
-          </a:bodyPr>
-          <a:lstStyle/>
-          <a:p>
-            <a:r>
-              <a:rPr sz="1400" b="1">
-                <a:solidFill>
-                  <a:srgbClr val="38BDF8"/>
-                </a:solidFill>
-              </a:rPr>
-              <a:t>Definición del Problema y Datos:
-</a:t>
-            </a:r>
-          </a:p>
-          <a:p>
-            <a:pPr>
-              <a:spcBef>
-                <a:spcPts val="800"/>
-              </a:spcBef>
-            </a:pPr>
-            <a:r>
-              <a:rPr sz="1100" b="1">
-                <a:solidFill>
-                  <a:srgbClr val="F8FAFC"/>
-                </a:solidFill>
-              </a:rPr>
-              <a:t>• Contexto de Negocio: </a:t>
-            </a:r>
-            <a:r>
-              <a:rPr sz="1000" b="0">
-                <a:solidFill>
-                  <a:srgbClr val="94A3B8"/>
-                </a:solidFill>
-              </a:rPr>
-              <a:t>Más de 100.000 lanzamientos diarios en Spotify; necesidad de transformar la intuición de A&amp;R en decisiones analíticas.</a:t>
-            </a:r>
-          </a:p>
-          <a:p>
-            <a:pPr>
-              <a:spcBef>
-                <a:spcPts val="800"/>
-              </a:spcBef>
-            </a:pPr>
-            <a:r>
-              <a:rPr sz="1100" b="1">
-                <a:solidFill>
-                  <a:srgbClr val="F8FAFC"/>
-                </a:solidFill>
-              </a:rPr>
-              <a:t>• Dimensión del Dataset: </a:t>
-            </a:r>
-            <a:r>
-              <a:rPr sz="1000" b="0">
-                <a:solidFill>
-                  <a:srgbClr val="94A3B8"/>
-                </a:solidFill>
-              </a:rPr>
-              <a:t>85.000 canciones y 17 variables originales que cubren atributos acústicos y metadatos de mercado.</a:t>
-            </a:r>
-          </a:p>
-          <a:p>
-            <a:pPr>
-              <a:spcBef>
-                <a:spcPts val="800"/>
-              </a:spcBef>
-            </a:pPr>
-            <a:r>
-              <a:rPr sz="1100" b="1">
-                <a:solidFill>
-                  <a:srgbClr val="F8FAFC"/>
-                </a:solidFill>
-              </a:rPr>
-              <a:t>• Variable Objetivo (Class): </a:t>
-            </a:r>
-            <a:r>
-              <a:rPr sz="1000" b="0">
-                <a:solidFill>
-                  <a:srgbClr val="94A3B8"/>
-                </a:solidFill>
-              </a:rPr>
-              <a:t>es_exito = 1 si las reproducciones superan el percentil 75 (Q₃ ≈ 85.2 M de streams), 0 en caso contrario.</a:t>
-            </a:r>
-          </a:p>
-          <a:p>
-            <a:pPr>
-              <a:spcBef>
-                <a:spcPts val="800"/>
-              </a:spcBef>
-            </a:pPr>
-            <a:r>
-              <a:rPr sz="1100" b="1">
-                <a:solidFill>
-                  <a:srgbClr val="F8FAFC"/>
-                </a:solidFill>
-              </a:rPr>
-              <a:t>• Hallazgo Clave del EDA: </a:t>
-            </a:r>
-            <a:r>
-              <a:rPr sz="1000" b="0">
-                <a:solidFill>
-                  <a:srgbClr val="94A3B8"/>
-                </a:solidFill>
-              </a:rPr>
-              <a:t>Fuerte asimetría positiva: el 25% superior de canciones concentra el 68% de los streams totales de la plataforma.</a:t>
-            </a:r>
-          </a:p>
-        </p:txBody>
-      </p:sp>
-      <p:sp>
-        <p:nvSpPr>
-          <p:cNvPr id="7" name="Rounded Rectangle 6"/>
-          <p:cNvSpPr/>
-          <p:nvPr/>
-        </p:nvSpPr>
-        <p:spPr>
-          <a:xfrm>
-            <a:off x="5760720" y="1371600"/>
-            <a:ext cx="5669280" cy="4937760"/>
-          </a:xfrm>
-          <a:prstGeom prst="roundRect">
-            <a:avLst/>
-          </a:prstGeom>
-          <a:solidFill>
-            <a:srgbClr val="181F2E"/>
-          </a:solidFill>
-          <a:ln w="12700">
-            <a:solidFill>
-              <a:srgbClr val="263047"/>
-            </a:solidFill>
-          </a:ln>
-        </p:spPr>
-        <p:style>
-          <a:lnRef idx="1">
-            <a:schemeClr val="accent1"/>
-          </a:lnRef>
-          <a:fillRef idx="3">
-            <a:schemeClr val="accent1"/>
-          </a:fillRef>
-          <a:effectRef idx="2">
-            <a:schemeClr val="accent1"/>
-          </a:effectRef>
-          <a:fontRef idx="minor">
-            <a:schemeClr val="lt1"/>
-          </a:fontRef>
-        </p:style>
-        <p:txBody>
-          <a:bodyPr rtlCol="0" anchor="ctr"/>
-          <a:lstStyle/>
-          <a:p>
-            <a:pPr algn="ctr"/>
-          </a:p>
-        </p:txBody>
-      </p:sp>
       <p:pic>
         <p:nvPicPr>
-          <p:cNvPr id="8" name="Picture 7" descr="distribucion_streams.png"/>
+          <p:cNvPr id="6" name="Picture 5" descr="distribucion_streams.png"/>
           <p:cNvPicPr>
             <a:picLocks noChangeAspect="1"/>
           </p:cNvPicPr>
@@ -3625,14 +3462,296 @@
         </p:blipFill>
         <p:spPr>
           <a:xfrm>
-            <a:off x="5897880" y="1691640"/>
-            <a:ext cx="5394960" cy="2074985"/>
+            <a:off x="868680" y="1645920"/>
+            <a:ext cx="6675120" cy="2567354"/>
           </a:xfrm>
           <a:prstGeom prst="rect">
             <a:avLst/>
           </a:prstGeom>
         </p:spPr>
       </p:pic>
+      <p:sp>
+        <p:nvSpPr>
+          <p:cNvPr id="7" name="Rounded Rectangle 6"/>
+          <p:cNvSpPr/>
+          <p:nvPr/>
+        </p:nvSpPr>
+        <p:spPr>
+          <a:xfrm>
+            <a:off x="7955279" y="1463040"/>
+            <a:ext cx="3474720" cy="1417320"/>
+          </a:xfrm>
+          <a:prstGeom prst="roundRect">
+            <a:avLst/>
+          </a:prstGeom>
+          <a:solidFill>
+            <a:srgbClr val="161E2E"/>
+          </a:solidFill>
+          <a:ln w="19050">
+            <a:solidFill>
+              <a:srgbClr val="38BDF8"/>
+            </a:solidFill>
+          </a:ln>
+        </p:spPr>
+        <p:style>
+          <a:lnRef idx="1">
+            <a:schemeClr val="accent1"/>
+          </a:lnRef>
+          <a:fillRef idx="3">
+            <a:schemeClr val="accent1"/>
+          </a:fillRef>
+          <a:effectRef idx="2">
+            <a:schemeClr val="accent1"/>
+          </a:effectRef>
+          <a:fontRef idx="minor">
+            <a:schemeClr val="lt1"/>
+          </a:fontRef>
+        </p:style>
+        <p:txBody>
+          <a:bodyPr rtlCol="0" anchor="ctr"/>
+          <a:lstStyle/>
+          <a:p>
+            <a:pPr algn="ctr"/>
+          </a:p>
+        </p:txBody>
+      </p:sp>
+      <p:sp>
+        <p:nvSpPr>
+          <p:cNvPr id="8" name="TextBox 7"/>
+          <p:cNvSpPr txBox="1"/>
+          <p:nvPr/>
+        </p:nvSpPr>
+        <p:spPr>
+          <a:xfrm>
+            <a:off x="8138160" y="1645920"/>
+            <a:ext cx="3108960" cy="1051560"/>
+          </a:xfrm>
+          <a:prstGeom prst="rect">
+            <a:avLst/>
+          </a:prstGeom>
+          <a:noFill/>
+        </p:spPr>
+        <p:txBody>
+          <a:bodyPr wrap="square">
+            <a:spAutoFit/>
+          </a:bodyPr>
+          <a:lstStyle/>
+          <a:p>
+            <a:r>
+              <a:rPr sz="1600" b="1">
+                <a:solidFill>
+                  <a:srgbClr val="38BDF8"/>
+                </a:solidFill>
+              </a:rPr>
+              <a:t>85.000 Registros
+</a:t>
+            </a:r>
+          </a:p>
+          <a:p>
+            <a:pPr>
+              <a:spcBef>
+                <a:spcPts val="400"/>
+              </a:spcBef>
+            </a:pPr>
+            <a:r>
+              <a:rPr sz="1250" b="0">
+                <a:solidFill>
+                  <a:srgbClr val="CBD5E1"/>
+                </a:solidFill>
+              </a:rPr>
+              <a:t>Catálogo global con 17 atributos acústicos y metadatos de mercado.</a:t>
+            </a:r>
+          </a:p>
+        </p:txBody>
+      </p:sp>
+      <p:sp>
+        <p:nvSpPr>
+          <p:cNvPr id="9" name="Rounded Rectangle 8"/>
+          <p:cNvSpPr/>
+          <p:nvPr/>
+        </p:nvSpPr>
+        <p:spPr>
+          <a:xfrm>
+            <a:off x="7955279" y="3063240"/>
+            <a:ext cx="3474720" cy="1417320"/>
+          </a:xfrm>
+          <a:prstGeom prst="roundRect">
+            <a:avLst/>
+          </a:prstGeom>
+          <a:solidFill>
+            <a:srgbClr val="161E2E"/>
+          </a:solidFill>
+          <a:ln w="19050">
+            <a:solidFill>
+              <a:srgbClr val="10B981"/>
+            </a:solidFill>
+          </a:ln>
+        </p:spPr>
+        <p:style>
+          <a:lnRef idx="1">
+            <a:schemeClr val="accent1"/>
+          </a:lnRef>
+          <a:fillRef idx="3">
+            <a:schemeClr val="accent1"/>
+          </a:fillRef>
+          <a:effectRef idx="2">
+            <a:schemeClr val="accent1"/>
+          </a:effectRef>
+          <a:fontRef idx="minor">
+            <a:schemeClr val="lt1"/>
+          </a:fontRef>
+        </p:style>
+        <p:txBody>
+          <a:bodyPr rtlCol="0" anchor="ctr"/>
+          <a:lstStyle/>
+          <a:p>
+            <a:pPr algn="ctr"/>
+          </a:p>
+        </p:txBody>
+      </p:sp>
+      <p:sp>
+        <p:nvSpPr>
+          <p:cNvPr id="10" name="TextBox 9"/>
+          <p:cNvSpPr txBox="1"/>
+          <p:nvPr/>
+        </p:nvSpPr>
+        <p:spPr>
+          <a:xfrm>
+            <a:off x="8138160" y="3246120"/>
+            <a:ext cx="3108960" cy="1051560"/>
+          </a:xfrm>
+          <a:prstGeom prst="rect">
+            <a:avLst/>
+          </a:prstGeom>
+          <a:noFill/>
+        </p:spPr>
+        <p:txBody>
+          <a:bodyPr wrap="square">
+            <a:spAutoFit/>
+          </a:bodyPr>
+          <a:lstStyle/>
+          <a:p>
+            <a:r>
+              <a:rPr sz="1600" b="1">
+                <a:solidFill>
+                  <a:srgbClr val="10B981"/>
+                </a:solidFill>
+              </a:rPr>
+              <a:t>Top 25% = Éxito
+</a:t>
+            </a:r>
+          </a:p>
+          <a:p>
+            <a:pPr>
+              <a:spcBef>
+                <a:spcPts val="400"/>
+              </a:spcBef>
+            </a:pPr>
+            <a:r>
+              <a:rPr sz="1250" b="0">
+                <a:solidFill>
+                  <a:srgbClr val="CBD5E1"/>
+                </a:solidFill>
+              </a:rPr>
+              <a:t>Corte en Percentil 75 (≥ 85.2M de streams) para definir la clase 'es_exito'.</a:t>
+            </a:r>
+          </a:p>
+        </p:txBody>
+      </p:sp>
+      <p:sp>
+        <p:nvSpPr>
+          <p:cNvPr id="11" name="Rounded Rectangle 10"/>
+          <p:cNvSpPr/>
+          <p:nvPr/>
+        </p:nvSpPr>
+        <p:spPr>
+          <a:xfrm>
+            <a:off x="7955279" y="4663440"/>
+            <a:ext cx="3474720" cy="1417320"/>
+          </a:xfrm>
+          <a:prstGeom prst="roundRect">
+            <a:avLst/>
+          </a:prstGeom>
+          <a:solidFill>
+            <a:srgbClr val="161E2E"/>
+          </a:solidFill>
+          <a:ln w="19050">
+            <a:solidFill>
+              <a:srgbClr val="F59E0B"/>
+            </a:solidFill>
+          </a:ln>
+        </p:spPr>
+        <p:style>
+          <a:lnRef idx="1">
+            <a:schemeClr val="accent1"/>
+          </a:lnRef>
+          <a:fillRef idx="3">
+            <a:schemeClr val="accent1"/>
+          </a:fillRef>
+          <a:effectRef idx="2">
+            <a:schemeClr val="accent1"/>
+          </a:effectRef>
+          <a:fontRef idx="minor">
+            <a:schemeClr val="lt1"/>
+          </a:fontRef>
+        </p:style>
+        <p:txBody>
+          <a:bodyPr rtlCol="0" anchor="ctr"/>
+          <a:lstStyle/>
+          <a:p>
+            <a:pPr algn="ctr"/>
+          </a:p>
+        </p:txBody>
+      </p:sp>
+      <p:sp>
+        <p:nvSpPr>
+          <p:cNvPr id="12" name="TextBox 11"/>
+          <p:cNvSpPr txBox="1"/>
+          <p:nvPr/>
+        </p:nvSpPr>
+        <p:spPr>
+          <a:xfrm>
+            <a:off x="8138160" y="4846320"/>
+            <a:ext cx="3108960" cy="1051560"/>
+          </a:xfrm>
+          <a:prstGeom prst="rect">
+            <a:avLst/>
+          </a:prstGeom>
+          <a:noFill/>
+        </p:spPr>
+        <p:txBody>
+          <a:bodyPr wrap="square">
+            <a:spAutoFit/>
+          </a:bodyPr>
+          <a:lstStyle/>
+          <a:p>
+            <a:r>
+              <a:rPr sz="1600" b="1">
+                <a:solidFill>
+                  <a:srgbClr val="F59E0B"/>
+                </a:solidFill>
+              </a:rPr>
+              <a:t>Fuerte Asimetría
+</a:t>
+            </a:r>
+          </a:p>
+          <a:p>
+            <a:pPr>
+              <a:spcBef>
+                <a:spcPts val="400"/>
+              </a:spcBef>
+            </a:pPr>
+            <a:r>
+              <a:rPr sz="1250" b="0">
+                <a:solidFill>
+                  <a:srgbClr val="CBD5E1"/>
+                </a:solidFill>
+              </a:rPr>
+              <a:t>El 25% de canciones concentra el 68% de las reproducciones totales.</a:t>
+            </a:r>
+          </a:p>
+        </p:txBody>
+      </p:sp>
     </p:spTree>
   </p:cSld>
   <p:clrMapOvr>
@@ -3666,7 +3785,7 @@
             <a:avLst/>
           </a:prstGeom>
           <a:solidFill>
-            <a:srgbClr val="0B0F19"/>
+            <a:srgbClr val="0A0E17"/>
           </a:solidFill>
           <a:ln>
             <a:noFill/>
@@ -3717,9 +3836,9 @@
           <a:lstStyle/>
           <a:p>
             <a:r>
-              <a:rPr sz="1000" b="1">
-                <a:solidFill>
-                  <a:srgbClr val="1DB954"/>
+              <a:rPr sz="1100" b="1">
+                <a:solidFill>
+                  <a:srgbClr val="38BDF8"/>
                 </a:solidFill>
               </a:rPr>
               <a:t>CRISP-DM — FASE 3</a:t>
@@ -3736,7 +3855,7 @@
         <p:spPr>
           <a:xfrm>
             <a:off x="731520" y="640080"/>
-            <a:ext cx="10698480" cy="640080"/>
+            <a:ext cx="10698480" cy="731520"/>
           </a:xfrm>
           <a:prstGeom prst="rect">
             <a:avLst/>
@@ -3750,12 +3869,12 @@
           <a:lstStyle/>
           <a:p>
             <a:r>
-              <a:rPr sz="2200" b="1">
-                <a:solidFill>
-                  <a:srgbClr val="F8FAFC"/>
-                </a:solidFill>
-              </a:rPr>
-              <a:t>Fase 3: Preparación Rigurosa de Datos y Preprocesamiento</a:t>
+              <a:rPr sz="2500" b="1">
+                <a:solidFill>
+                  <a:srgbClr val="FFFFFF"/>
+                </a:solidFill>
+              </a:rPr>
+              <a:t>Fase 3: Preparación Rigurosa de los Datos</a:t>
             </a:r>
           </a:p>
         </p:txBody>
@@ -3769,17 +3888,17 @@
         <p:spPr>
           <a:xfrm>
             <a:off x="731520" y="1463040"/>
-            <a:ext cx="3383280" cy="4754880"/>
+            <a:ext cx="3383280" cy="4846320"/>
           </a:xfrm>
           <a:prstGeom prst="roundRect">
             <a:avLst/>
           </a:prstGeom>
           <a:solidFill>
-            <a:srgbClr val="181F2E"/>
+            <a:srgbClr val="161E2E"/>
           </a:solidFill>
-          <a:ln w="12700">
+          <a:ln w="19050">
             <a:solidFill>
-              <a:srgbClr val="1DB954"/>
+              <a:srgbClr val="10B981"/>
             </a:solidFill>
           </a:ln>
         </p:spPr>
@@ -3813,8 +3932,8 @@
         </p:nvSpPr>
         <p:spPr>
           <a:xfrm>
-            <a:off x="914400" y="1645920"/>
-            <a:ext cx="3017520" cy="4389120"/>
+            <a:off x="960120" y="1691640"/>
+            <a:ext cx="2926080" cy="4389120"/>
           </a:xfrm>
           <a:prstGeom prst="rect">
             <a:avLst/>
@@ -3828,23 +3947,12 @@
           <a:lstStyle/>
           <a:p>
             <a:r>
-              <a:rPr sz="1300" b="1">
-                <a:solidFill>
-                  <a:srgbClr val="1DB954"/>
-                </a:solidFill>
-              </a:rPr>
-              <a:t>🧹 Valores Nulos y Limpieza
-</a:t>
-            </a:r>
-          </a:p>
-          <a:p>
-            <a:r>
-              <a:rPr sz="1100" b="1">
-                <a:solidFill>
-                  <a:srgbClr val="F8FAFC"/>
-                </a:solidFill>
-              </a:rPr>
-              <a:t>Menos del 0.2% del dataset
+              <a:rPr sz="1700" b="1">
+                <a:solidFill>
+                  <a:srgbClr val="10B981"/>
+                </a:solidFill>
+              </a:rPr>
+              <a:t>🧹 Limpieza de Nulos
 </a:t>
             </a:r>
           </a:p>
@@ -3855,12 +3963,137 @@
               </a:spcBef>
             </a:pPr>
             <a:r>
-              <a:rPr sz="1000" b="0">
-                <a:solidFill>
-                  <a:srgbClr val="94A3B8"/>
-                </a:solidFill>
-              </a:rPr>
-              <a:t>• Auditoría con df.isnull().sum().</a:t>
+              <a:rPr sz="1300" b="1">
+                <a:solidFill>
+                  <a:srgbClr val="FFFFFF"/>
+                </a:solidFill>
+              </a:rPr>
+              <a:t>99.8% de Calidad
+</a:t>
+            </a:r>
+          </a:p>
+          <a:p>
+            <a:pPr>
+              <a:spcBef>
+                <a:spcPts val="800"/>
+              </a:spcBef>
+            </a:pPr>
+            <a:r>
+              <a:rPr sz="1250" b="0">
+                <a:solidFill>
+                  <a:srgbClr val="CBD5E1"/>
+                </a:solidFill>
+              </a:rPr>
+              <a:t>✔ Eliminación por lista de solo 180 registros incompletos.</a:t>
+            </a:r>
+          </a:p>
+          <a:p>
+            <a:pPr>
+              <a:spcBef>
+                <a:spcPts val="800"/>
+              </a:spcBef>
+            </a:pPr>
+            <a:r>
+              <a:rPr sz="1250" b="0">
+                <a:solidFill>
+                  <a:srgbClr val="CBD5E1"/>
+                </a:solidFill>
+              </a:rPr>
+              <a:t>✔ Cero sesgos por imputación artificial en variables acústicas.</a:t>
+            </a:r>
+          </a:p>
+          <a:p>
+            <a:pPr>
+              <a:spcBef>
+                <a:spcPts val="800"/>
+              </a:spcBef>
+            </a:pPr>
+            <a:r>
+              <a:rPr sz="1250" b="0">
+                <a:solidFill>
+                  <a:srgbClr val="CBD5E1"/>
+                </a:solidFill>
+              </a:rPr>
+              <a:t>✔ Preservación íntegra de 85.000 pistas.</a:t>
+            </a:r>
+          </a:p>
+        </p:txBody>
+      </p:sp>
+      <p:sp>
+        <p:nvSpPr>
+          <p:cNvPr id="7" name="Rounded Rectangle 6"/>
+          <p:cNvSpPr/>
+          <p:nvPr/>
+        </p:nvSpPr>
+        <p:spPr>
+          <a:xfrm>
+            <a:off x="4389120" y="1463040"/>
+            <a:ext cx="3383280" cy="4846320"/>
+          </a:xfrm>
+          <a:prstGeom prst="roundRect">
+            <a:avLst/>
+          </a:prstGeom>
+          <a:solidFill>
+            <a:srgbClr val="161E2E"/>
+          </a:solidFill>
+          <a:ln w="19050">
+            <a:solidFill>
+              <a:srgbClr val="38BDF8"/>
+            </a:solidFill>
+          </a:ln>
+        </p:spPr>
+        <p:style>
+          <a:lnRef idx="1">
+            <a:schemeClr val="accent1"/>
+          </a:lnRef>
+          <a:fillRef idx="3">
+            <a:schemeClr val="accent1"/>
+          </a:fillRef>
+          <a:effectRef idx="2">
+            <a:schemeClr val="accent1"/>
+          </a:effectRef>
+          <a:fontRef idx="minor">
+            <a:schemeClr val="lt1"/>
+          </a:fontRef>
+        </p:style>
+        <p:txBody>
+          <a:bodyPr rtlCol="0" anchor="ctr"/>
+          <a:lstStyle/>
+          <a:p>
+            <a:pPr algn="ctr"/>
+          </a:p>
+        </p:txBody>
+      </p:sp>
+      <p:sp>
+        <p:nvSpPr>
+          <p:cNvPr id="8" name="TextBox 7"/>
+          <p:cNvSpPr txBox="1"/>
+          <p:nvPr/>
+        </p:nvSpPr>
+        <p:spPr>
+          <a:xfrm>
+            <a:off x="4617720" y="1691640"/>
+            <a:ext cx="2926080" cy="4389120"/>
+          </a:xfrm>
+          <a:prstGeom prst="rect">
+            <a:avLst/>
+          </a:prstGeom>
+          <a:noFill/>
+        </p:spPr>
+        <p:txBody>
+          <a:bodyPr wrap="square">
+            <a:spAutoFit/>
+          </a:bodyPr>
+          <a:lstStyle/>
+          <a:p>
+            <a:r>
+              <a:rPr sz="1700" b="1">
+                <a:solidFill>
+                  <a:srgbClr val="38BDF8"/>
+                </a:solidFill>
+              </a:rPr>
+              <a:t>📐 Outliers con IQR
+</a:t>
             </a:r>
           </a:p>
           <a:p>
@@ -3870,12 +4103,137 @@
               </a:spcBef>
             </a:pPr>
             <a:r>
-              <a:rPr sz="1000" b="0">
-                <a:solidFill>
-                  <a:srgbClr val="94A3B8"/>
-                </a:solidFill>
-              </a:rPr>
-              <a:t>• Eliminación por lista (listwise deletion) sobre 180 filas con texto o audio ausente.</a:t>
+              <a:rPr sz="1300" b="1">
+                <a:solidFill>
+                  <a:srgbClr val="FFFFFF"/>
+                </a:solidFill>
+              </a:rPr>
+              <a:t>Fórmula: Q₃ - Q₁
+</a:t>
+            </a:r>
+          </a:p>
+          <a:p>
+            <a:pPr>
+              <a:spcBef>
+                <a:spcPts val="800"/>
+              </a:spcBef>
+            </a:pPr>
+            <a:r>
+              <a:rPr sz="1250" b="0">
+                <a:solidFill>
+                  <a:srgbClr val="CBD5E1"/>
+                </a:solidFill>
+              </a:rPr>
+              <a:t>✔ Límites: Q₁ - 1.5×IQR y Q₃ + 1.5×IQR.</a:t>
+            </a:r>
+          </a:p>
+          <a:p>
+            <a:pPr>
+              <a:spcBef>
+                <a:spcPts val="800"/>
+              </a:spcBef>
+            </a:pPr>
+            <a:r>
+              <a:rPr sz="1250" b="0">
+                <a:solidFill>
+                  <a:srgbClr val="CBD5E1"/>
+                </a:solidFill>
+              </a:rPr>
+              <a:t>✔ Winsorización (1% y 99%) en BPM y variables extremas.</a:t>
+            </a:r>
+          </a:p>
+          <a:p>
+            <a:pPr>
+              <a:spcBef>
+                <a:spcPts val="800"/>
+              </a:spcBef>
+            </a:pPr>
+            <a:r>
+              <a:rPr sz="1250" b="0">
+                <a:solidFill>
+                  <a:srgbClr val="CBD5E1"/>
+                </a:solidFill>
+              </a:rPr>
+              <a:t>✔ Conservación intencional de Mega-Hits.</a:t>
+            </a:r>
+          </a:p>
+        </p:txBody>
+      </p:sp>
+      <p:sp>
+        <p:nvSpPr>
+          <p:cNvPr id="9" name="Rounded Rectangle 8"/>
+          <p:cNvSpPr/>
+          <p:nvPr/>
+        </p:nvSpPr>
+        <p:spPr>
+          <a:xfrm>
+            <a:off x="8046720" y="1463040"/>
+            <a:ext cx="3383280" cy="4846320"/>
+          </a:xfrm>
+          <a:prstGeom prst="roundRect">
+            <a:avLst/>
+          </a:prstGeom>
+          <a:solidFill>
+            <a:srgbClr val="161E2E"/>
+          </a:solidFill>
+          <a:ln w="19050">
+            <a:solidFill>
+              <a:srgbClr val="F59E0B"/>
+            </a:solidFill>
+          </a:ln>
+        </p:spPr>
+        <p:style>
+          <a:lnRef idx="1">
+            <a:schemeClr val="accent1"/>
+          </a:lnRef>
+          <a:fillRef idx="3">
+            <a:schemeClr val="accent1"/>
+          </a:fillRef>
+          <a:effectRef idx="2">
+            <a:schemeClr val="accent1"/>
+          </a:effectRef>
+          <a:fontRef idx="minor">
+            <a:schemeClr val="lt1"/>
+          </a:fontRef>
+        </p:style>
+        <p:txBody>
+          <a:bodyPr rtlCol="0" anchor="ctr"/>
+          <a:lstStyle/>
+          <a:p>
+            <a:pPr algn="ctr"/>
+          </a:p>
+        </p:txBody>
+      </p:sp>
+      <p:sp>
+        <p:nvSpPr>
+          <p:cNvPr id="10" name="TextBox 9"/>
+          <p:cNvSpPr txBox="1"/>
+          <p:nvPr/>
+        </p:nvSpPr>
+        <p:spPr>
+          <a:xfrm>
+            <a:off x="8275320" y="1691640"/>
+            <a:ext cx="2926080" cy="4389120"/>
+          </a:xfrm>
+          <a:prstGeom prst="rect">
+            <a:avLst/>
+          </a:prstGeom>
+          <a:noFill/>
+        </p:spPr>
+        <p:txBody>
+          <a:bodyPr wrap="square">
+            <a:spAutoFit/>
+          </a:bodyPr>
+          <a:lstStyle/>
+          <a:p>
+            <a:r>
+              <a:rPr sz="1700" b="1">
+                <a:solidFill>
+                  <a:srgbClr val="F59E0B"/>
+                </a:solidFill>
+              </a:rPr>
+              <a:t>⚖️ Escalado y Split
+</a:t>
             </a:r>
           </a:p>
           <a:p>
@@ -3885,312 +4243,58 @@
               </a:spcBef>
             </a:pPr>
             <a:r>
-              <a:rPr sz="1000" b="0">
-                <a:solidFill>
-                  <a:srgbClr val="94A3B8"/>
-                </a:solidFill>
-              </a:rPr>
-              <a:t>• Preservación total de las 85.000 canciones válidas sin sesgos artificiales.</a:t>
-            </a:r>
-          </a:p>
-        </p:txBody>
-      </p:sp>
-      <p:sp>
-        <p:nvSpPr>
-          <p:cNvPr id="7" name="Rounded Rectangle 6"/>
-          <p:cNvSpPr/>
-          <p:nvPr/>
-        </p:nvSpPr>
-        <p:spPr>
-          <a:xfrm>
-            <a:off x="4389120" y="1463040"/>
-            <a:ext cx="3383280" cy="4754880"/>
-          </a:xfrm>
-          <a:prstGeom prst="roundRect">
-            <a:avLst/>
-          </a:prstGeom>
-          <a:solidFill>
-            <a:srgbClr val="181F2E"/>
-          </a:solidFill>
-          <a:ln w="12700">
-            <a:solidFill>
-              <a:srgbClr val="38BDF8"/>
-            </a:solidFill>
-          </a:ln>
-        </p:spPr>
-        <p:style>
-          <a:lnRef idx="1">
-            <a:schemeClr val="accent1"/>
-          </a:lnRef>
-          <a:fillRef idx="3">
-            <a:schemeClr val="accent1"/>
-          </a:fillRef>
-          <a:effectRef idx="2">
-            <a:schemeClr val="accent1"/>
-          </a:effectRef>
-          <a:fontRef idx="minor">
-            <a:schemeClr val="lt1"/>
-          </a:fontRef>
-        </p:style>
-        <p:txBody>
-          <a:bodyPr rtlCol="0" anchor="ctr"/>
-          <a:lstStyle/>
-          <a:p>
-            <a:pPr algn="ctr"/>
-          </a:p>
-        </p:txBody>
-      </p:sp>
-      <p:sp>
-        <p:nvSpPr>
-          <p:cNvPr id="8" name="TextBox 7"/>
-          <p:cNvSpPr txBox="1"/>
-          <p:nvPr/>
-        </p:nvSpPr>
-        <p:spPr>
-          <a:xfrm>
-            <a:off x="4572000" y="1645920"/>
-            <a:ext cx="3017520" cy="4389120"/>
-          </a:xfrm>
-          <a:prstGeom prst="rect">
-            <a:avLst/>
-          </a:prstGeom>
-          <a:noFill/>
-        </p:spPr>
-        <p:txBody>
-          <a:bodyPr wrap="square">
-            <a:spAutoFit/>
-          </a:bodyPr>
-          <a:lstStyle/>
-          <a:p>
-            <a:r>
               <a:rPr sz="1300" b="1">
                 <a:solidFill>
-                  <a:srgbClr val="38BDF8"/>
-                </a:solidFill>
-              </a:rPr>
-              <a:t>📐 Outliers con Rango IQR
-</a:t>
-            </a:r>
-          </a:p>
-          <a:p>
-            <a:r>
-              <a:rPr sz="1100" b="1">
-                <a:solidFill>
-                  <a:srgbClr val="F8FAFC"/>
-                </a:solidFill>
-              </a:rPr>
-              <a:t>Fórmula: IQR = Q₃ - Q₁
+                  <a:srgbClr val="FFFFFF"/>
+                </a:solidFill>
+              </a:rPr>
+              <a:t>StandardScaler (Z)
 </a:t>
             </a:r>
           </a:p>
           <a:p>
             <a:pPr>
               <a:spcBef>
-                <a:spcPts val="400"/>
+                <a:spcPts val="800"/>
               </a:spcBef>
             </a:pPr>
             <a:r>
-              <a:rPr sz="1000" b="0">
-                <a:solidFill>
-                  <a:srgbClr val="94A3B8"/>
-                </a:solidFill>
-              </a:rPr>
-              <a:t>• Límite Inferior: Q₁ - (1,5 × IQR)</a:t>
+              <a:rPr sz="1250" b="0">
+                <a:solidFill>
+                  <a:srgbClr val="CBD5E1"/>
+                </a:solidFill>
+              </a:rPr>
+              <a:t>✔ Estandarización: media 0 y varianza unitaria 1.</a:t>
             </a:r>
           </a:p>
           <a:p>
             <a:pPr>
               <a:spcBef>
-                <a:spcPts val="400"/>
+                <a:spcPts val="800"/>
               </a:spcBef>
             </a:pPr>
             <a:r>
-              <a:rPr sz="1000" b="0">
-                <a:solidFill>
-                  <a:srgbClr val="94A3B8"/>
-                </a:solidFill>
-              </a:rPr>
-              <a:t>• Límite Superior: Q₃ + (1,5 × IQR)</a:t>
+              <a:rPr sz="1250" b="0">
+                <a:solidFill>
+                  <a:srgbClr val="CBD5E1"/>
+                </a:solidFill>
+              </a:rPr>
+              <a:t>✔ Evita distorsión en distancias de K-Means.</a:t>
             </a:r>
           </a:p>
           <a:p>
             <a:pPr>
               <a:spcBef>
-                <a:spcPts val="400"/>
+                <a:spcPts val="800"/>
               </a:spcBef>
             </a:pPr>
             <a:r>
-              <a:rPr sz="1000" b="0">
-                <a:solidFill>
-                  <a:srgbClr val="94A3B8"/>
-                </a:solidFill>
-              </a:rPr>
-              <a:t>• Winsorización acotada (1% y 99%) en BPM y variables extremas.</a:t>
-            </a:r>
-          </a:p>
-          <a:p>
-            <a:pPr>
-              <a:spcBef>
-                <a:spcPts val="400"/>
-              </a:spcBef>
-            </a:pPr>
-            <a:r>
-              <a:rPr sz="1000" b="0">
-                <a:solidFill>
-                  <a:srgbClr val="94A3B8"/>
-                </a:solidFill>
-              </a:rPr>
-              <a:t>• Conservación justificada de Mega-Hits por valor estratégico de negocio.</a:t>
-            </a:r>
-          </a:p>
-        </p:txBody>
-      </p:sp>
-      <p:sp>
-        <p:nvSpPr>
-          <p:cNvPr id="9" name="Rounded Rectangle 8"/>
-          <p:cNvSpPr/>
-          <p:nvPr/>
-        </p:nvSpPr>
-        <p:spPr>
-          <a:xfrm>
-            <a:off x="8046720" y="1463040"/>
-            <a:ext cx="3383280" cy="4754880"/>
-          </a:xfrm>
-          <a:prstGeom prst="roundRect">
-            <a:avLst/>
-          </a:prstGeom>
-          <a:solidFill>
-            <a:srgbClr val="181F2E"/>
-          </a:solidFill>
-          <a:ln w="12700">
-            <a:solidFill>
-              <a:srgbClr val="EAB308"/>
-            </a:solidFill>
-          </a:ln>
-        </p:spPr>
-        <p:style>
-          <a:lnRef idx="1">
-            <a:schemeClr val="accent1"/>
-          </a:lnRef>
-          <a:fillRef idx="3">
-            <a:schemeClr val="accent1"/>
-          </a:fillRef>
-          <a:effectRef idx="2">
-            <a:schemeClr val="accent1"/>
-          </a:effectRef>
-          <a:fontRef idx="minor">
-            <a:schemeClr val="lt1"/>
-          </a:fontRef>
-        </p:style>
-        <p:txBody>
-          <a:bodyPr rtlCol="0" anchor="ctr"/>
-          <a:lstStyle/>
-          <a:p>
-            <a:pPr algn="ctr"/>
-          </a:p>
-        </p:txBody>
-      </p:sp>
-      <p:sp>
-        <p:nvSpPr>
-          <p:cNvPr id="10" name="TextBox 9"/>
-          <p:cNvSpPr txBox="1"/>
-          <p:nvPr/>
-        </p:nvSpPr>
-        <p:spPr>
-          <a:xfrm>
-            <a:off x="8229600" y="1645920"/>
-            <a:ext cx="3017520" cy="4389120"/>
-          </a:xfrm>
-          <a:prstGeom prst="rect">
-            <a:avLst/>
-          </a:prstGeom>
-          <a:noFill/>
-        </p:spPr>
-        <p:txBody>
-          <a:bodyPr wrap="square">
-            <a:spAutoFit/>
-          </a:bodyPr>
-          <a:lstStyle/>
-          <a:p>
-            <a:r>
-              <a:rPr sz="1300" b="1">
-                <a:solidFill>
-                  <a:srgbClr val="EAB308"/>
-                </a:solidFill>
-              </a:rPr>
-              <a:t>⚖️ Estandarización y Split
-</a:t>
-            </a:r>
-          </a:p>
-          <a:p>
-            <a:r>
-              <a:rPr sz="1100" b="1">
-                <a:solidFill>
-                  <a:srgbClr val="F8FAFC"/>
-                </a:solidFill>
-              </a:rPr>
-              <a:t>StandardScaler + 80/20
-</a:t>
-            </a:r>
-          </a:p>
-          <a:p>
-            <a:pPr>
-              <a:spcBef>
-                <a:spcPts val="400"/>
-              </a:spcBef>
-            </a:pPr>
-            <a:r>
-              <a:rPr sz="1000" b="0">
-                <a:solidFill>
-                  <a:srgbClr val="94A3B8"/>
-                </a:solidFill>
-              </a:rPr>
-              <a:t>• Fórmula Z: z = (x - μ) / σ</a:t>
-            </a:r>
-          </a:p>
-          <a:p>
-            <a:pPr>
-              <a:spcBef>
-                <a:spcPts val="400"/>
-              </a:spcBef>
-            </a:pPr>
-            <a:r>
-              <a:rPr sz="1000" b="0">
-                <a:solidFill>
-                  <a:srgbClr val="94A3B8"/>
-                </a:solidFill>
-              </a:rPr>
-              <a:t>• Atributos con media μ = 0 y varianza unitaria σ² = 1.</a:t>
-            </a:r>
-          </a:p>
-          <a:p>
-            <a:pPr>
-              <a:spcBef>
-                <a:spcPts val="400"/>
-              </a:spcBef>
-            </a:pPr>
-            <a:r>
-              <a:rPr sz="1000" b="0">
-                <a:solidFill>
-                  <a:srgbClr val="94A3B8"/>
-                </a:solidFill>
-              </a:rPr>
-              <a:t>• Evita distorsión en distancias euclidianas de K-Means.</a:t>
-            </a:r>
-          </a:p>
-          <a:p>
-            <a:pPr>
-              <a:spcBef>
-                <a:spcPts val="400"/>
-              </a:spcBef>
-            </a:pPr>
-            <a:r>
-              <a:rPr sz="1000" b="0">
-                <a:solidFill>
-                  <a:srgbClr val="94A3B8"/>
-                </a:solidFill>
-              </a:rPr>
-              <a:t>• Partición estratificada (stratify=y): 68.000 Train / 17.000 Test.</a:t>
+              <a:rPr sz="1250" b="0">
+                <a:solidFill>
+                  <a:srgbClr val="CBD5E1"/>
+                </a:solidFill>
+              </a:rPr>
+              <a:t>✔ Split estratificado: 80% Train / 20% Test.</a:t>
             </a:r>
           </a:p>
         </p:txBody>
@@ -4228,7 +4332,7 @@
             <a:avLst/>
           </a:prstGeom>
           <a:solidFill>
-            <a:srgbClr val="0B0F19"/>
+            <a:srgbClr val="0A0E17"/>
           </a:solidFill>
           <a:ln>
             <a:noFill/>
@@ -4279,12 +4383,12 @@
           <a:lstStyle/>
           <a:p>
             <a:r>
-              <a:rPr sz="1000" b="1">
-                <a:solidFill>
-                  <a:srgbClr val="1DB954"/>
-                </a:solidFill>
-              </a:rPr>
-              <a:t>CRISP-DM — FASE 4 (MODELADO)</a:t>
+              <a:rPr sz="1100" b="1">
+                <a:solidFill>
+                  <a:srgbClr val="10B981"/>
+                </a:solidFill>
+              </a:rPr>
+              <a:t>CRISP-DM — ASOCIACIÓN</a:t>
             </a:r>
           </a:p>
         </p:txBody>
@@ -4298,7 +4402,7 @@
         <p:spPr>
           <a:xfrm>
             <a:off x="731520" y="640080"/>
-            <a:ext cx="10698480" cy="640080"/>
+            <a:ext cx="10698480" cy="731520"/>
           </a:xfrm>
           <a:prstGeom prst="rect">
             <a:avLst/>
@@ -4312,12 +4416,12 @@
           <a:lstStyle/>
           <a:p>
             <a:r>
-              <a:rPr sz="2200" b="1">
-                <a:solidFill>
-                  <a:srgbClr val="F8FAFC"/>
-                </a:solidFill>
-              </a:rPr>
-              <a:t>Fase 4A: Minería de Reglas de Asociación con Apriori</a:t>
+              <a:rPr sz="2500" b="1">
+                <a:solidFill>
+                  <a:srgbClr val="FFFFFF"/>
+                </a:solidFill>
+              </a:rPr>
+              <a:t>Fase 4A: Reglas de Asociación con Apriori</a:t>
             </a:r>
           </a:p>
         </p:txBody>
@@ -4330,18 +4434,18 @@
         </p:nvSpPr>
         <p:spPr>
           <a:xfrm>
-            <a:off x="731520" y="1371600"/>
-            <a:ext cx="10728655" cy="4937760"/>
+            <a:off x="731520" y="1463040"/>
+            <a:ext cx="10728655" cy="2286000"/>
           </a:xfrm>
           <a:prstGeom prst="roundRect">
             <a:avLst/>
           </a:prstGeom>
           <a:solidFill>
-            <a:srgbClr val="181F2E"/>
+            <a:srgbClr val="161E2E"/>
           </a:solidFill>
-          <a:ln w="12700">
+          <a:ln w="19050">
             <a:solidFill>
-              <a:srgbClr val="263047"/>
+              <a:srgbClr val="10B981"/>
             </a:solidFill>
           </a:ln>
         </p:spPr>
@@ -4375,8 +4479,8 @@
         </p:nvSpPr>
         <p:spPr>
           <a:xfrm>
-            <a:off x="1005840" y="1554480"/>
-            <a:ext cx="10149840" cy="4572000"/>
+            <a:off x="1005840" y="1645920"/>
+            <a:ext cx="10149840" cy="1920240"/>
           </a:xfrm>
           <a:prstGeom prst="rect">
             <a:avLst/>
@@ -4390,109 +4494,241 @@
           <a:lstStyle/>
           <a:p>
             <a:r>
-              <a:rPr sz="1400" b="1">
-                <a:solidFill>
-                  <a:srgbClr val="38BDF8"/>
-                </a:solidFill>
-              </a:rPr>
-              <a:t>Descubrimiento de Patrones de Afinidad (Librería mlxtend):
+              <a:rPr sz="1600" b="1">
+                <a:solidFill>
+                  <a:srgbClr val="10B981"/>
+                </a:solidFill>
+              </a:rPr>
+              <a:t>REGLA CLAVE DE MERCADO (LIFT = 3,40)
 </a:t>
             </a:r>
           </a:p>
           <a:p>
             <a:pPr>
               <a:spcBef>
-                <a:spcPts val="800"/>
+                <a:spcPts val="600"/>
               </a:spcBef>
             </a:pPr>
             <a:r>
-              <a:rPr sz="1150" b="1">
-                <a:solidFill>
-                  <a:srgbClr val="1DB954"/>
-                </a:solidFill>
-              </a:rPr>
-              <a:t>📌 Regla N° 1: [ Canción con Alta Popularidad ]  ➔  [ Alto Volumen de Streams + Género Pop ]
+              <a:rPr sz="2000" b="1">
+                <a:solidFill>
+                  <a:srgbClr val="FFFFFF"/>
+                </a:solidFill>
+              </a:rPr>
+              <a:t>[ Alto Volumen de Streams  +  Género Pop ]  ➔  [ Canción de Alta Popularidad ]
 </a:t>
-            </a:r>
-            <a:r>
-              <a:rPr sz="1050" b="0">
-                <a:solidFill>
-                  <a:srgbClr val="F8FAFC"/>
-                </a:solidFill>
-              </a:rPr>
-              <a:t>    Soporte: 1,21% | Confianza: 6,69% | Lift: 3,40 (Multiplicador de probabilidad respecto al azar)</a:t>
             </a:r>
           </a:p>
           <a:p>
             <a:pPr>
               <a:spcBef>
-                <a:spcPts val="800"/>
+                <a:spcPts val="600"/>
               </a:spcBef>
             </a:pPr>
             <a:r>
-              <a:rPr sz="1150" b="1">
-                <a:solidFill>
-                  <a:srgbClr val="1DB954"/>
-                </a:solidFill>
-              </a:rPr>
-              <a:t>📌 Regla N° 2: [ Alto Volumen de Streams + Género Pop ]  ➔  [ Canción con Alta Popularidad ]
+              <a:rPr sz="1400" b="0">
+                <a:solidFill>
+                  <a:srgbClr val="38BDF8"/>
+                </a:solidFill>
+              </a:rPr>
+              <a:t>• Confianza: 61,33% (6 de cada 10 temas cumplen la regla)   • Soporte: 1,21% (+1.020 canciones)</a:t>
+            </a:r>
+          </a:p>
+        </p:txBody>
+      </p:sp>
+      <p:sp>
+        <p:nvSpPr>
+          <p:cNvPr id="7" name="Rounded Rectangle 6"/>
+          <p:cNvSpPr/>
+          <p:nvPr/>
+        </p:nvSpPr>
+        <p:spPr>
+          <a:xfrm>
+            <a:off x="731520" y="3977639"/>
+            <a:ext cx="5212080" cy="2331720"/>
+          </a:xfrm>
+          <a:prstGeom prst="roundRect">
+            <a:avLst/>
+          </a:prstGeom>
+          <a:solidFill>
+            <a:srgbClr val="161E2E"/>
+          </a:solidFill>
+          <a:ln w="19050">
+            <a:solidFill>
+              <a:srgbClr val="38BDF8"/>
+            </a:solidFill>
+          </a:ln>
+        </p:spPr>
+        <p:style>
+          <a:lnRef idx="1">
+            <a:schemeClr val="accent1"/>
+          </a:lnRef>
+          <a:fillRef idx="3">
+            <a:schemeClr val="accent1"/>
+          </a:fillRef>
+          <a:effectRef idx="2">
+            <a:schemeClr val="accent1"/>
+          </a:effectRef>
+          <a:fontRef idx="minor">
+            <a:schemeClr val="lt1"/>
+          </a:fontRef>
+        </p:style>
+        <p:txBody>
+          <a:bodyPr rtlCol="0" anchor="ctr"/>
+          <a:lstStyle/>
+          <a:p>
+            <a:pPr algn="ctr"/>
+          </a:p>
+        </p:txBody>
+      </p:sp>
+      <p:sp>
+        <p:nvSpPr>
+          <p:cNvPr id="8" name="TextBox 7"/>
+          <p:cNvSpPr txBox="1"/>
+          <p:nvPr/>
+        </p:nvSpPr>
+        <p:spPr>
+          <a:xfrm>
+            <a:off x="914400" y="4114800"/>
+            <a:ext cx="4846320" cy="2011680"/>
+          </a:xfrm>
+          <a:prstGeom prst="rect">
+            <a:avLst/>
+          </a:prstGeom>
+          <a:noFill/>
+        </p:spPr>
+        <p:txBody>
+          <a:bodyPr wrap="square">
+            <a:spAutoFit/>
+          </a:bodyPr>
+          <a:lstStyle/>
+          <a:p>
+            <a:r>
+              <a:rPr sz="1600" b="1">
+                <a:solidFill>
+                  <a:srgbClr val="38BDF8"/>
+                </a:solidFill>
+              </a:rPr>
+              <a:t>Regla Alternativa: Género R&amp;B
 </a:t>
-            </a:r>
-            <a:r>
-              <a:rPr sz="1050" b="0">
-                <a:solidFill>
-                  <a:srgbClr val="F8FAFC"/>
-                </a:solidFill>
-              </a:rPr>
-              <a:t>    Soporte: 1,21% | Confianza: 61,33% (El 61,3% de temas Pop con alto stream logran alta popularidad) | Lift: 3,40</a:t>
             </a:r>
           </a:p>
           <a:p>
             <a:pPr>
               <a:spcBef>
-                <a:spcPts val="800"/>
+                <a:spcPts val="400"/>
               </a:spcBef>
             </a:pPr>
             <a:r>
-              <a:rPr sz="1150" b="1">
-                <a:solidFill>
-                  <a:srgbClr val="1DB954"/>
-                </a:solidFill>
-              </a:rPr>
-              <a:t>📌 Regla N° 3: [ Género R&amp;B + Alto Volumen de Streams ]  ➔  [ Canción con Alta Popularidad ]
+              <a:rPr sz="1400" b="1">
+                <a:solidFill>
+                  <a:srgbClr val="FFFFFF"/>
+                </a:solidFill>
+              </a:rPr>
+              <a:t>[ Género R&amp;B + Alto Stream ] ➔ [ Alta Popularidad ]
 </a:t>
             </a:r>
             <a:r>
-              <a:rPr sz="1050" b="0">
-                <a:solidFill>
-                  <a:srgbClr val="F8FAFC"/>
-                </a:solidFill>
-              </a:rPr>
-              <a:t>    Soporte: 1,23% | Confianza: 60,03% (6 de cada 10 temas de R&amp;B con tracción son populares) | Lift: 3,33</a:t>
+              <a:rPr sz="1300" b="0">
+                <a:solidFill>
+                  <a:srgbClr val="CBD5E1"/>
+                </a:solidFill>
+              </a:rPr>
+              <a:t>Lift: 3,33  |  Confianza: 60,03% en el catálogo musical.</a:t>
+            </a:r>
+          </a:p>
+        </p:txBody>
+      </p:sp>
+      <p:sp>
+        <p:nvSpPr>
+          <p:cNvPr id="9" name="Rounded Rectangle 8"/>
+          <p:cNvSpPr/>
+          <p:nvPr/>
+        </p:nvSpPr>
+        <p:spPr>
+          <a:xfrm>
+            <a:off x="6248095" y="3977639"/>
+            <a:ext cx="5212080" cy="2331720"/>
+          </a:xfrm>
+          <a:prstGeom prst="roundRect">
+            <a:avLst/>
+          </a:prstGeom>
+          <a:solidFill>
+            <a:srgbClr val="161E2E"/>
+          </a:solidFill>
+          <a:ln w="19050">
+            <a:solidFill>
+              <a:srgbClr val="F59E0B"/>
+            </a:solidFill>
+          </a:ln>
+        </p:spPr>
+        <p:style>
+          <a:lnRef idx="1">
+            <a:schemeClr val="accent1"/>
+          </a:lnRef>
+          <a:fillRef idx="3">
+            <a:schemeClr val="accent1"/>
+          </a:fillRef>
+          <a:effectRef idx="2">
+            <a:schemeClr val="accent1"/>
+          </a:effectRef>
+          <a:fontRef idx="minor">
+            <a:schemeClr val="lt1"/>
+          </a:fontRef>
+        </p:style>
+        <p:txBody>
+          <a:bodyPr rtlCol="0" anchor="ctr"/>
+          <a:lstStyle/>
+          <a:p>
+            <a:pPr algn="ctr"/>
+          </a:p>
+        </p:txBody>
+      </p:sp>
+      <p:sp>
+        <p:nvSpPr>
+          <p:cNvPr id="10" name="TextBox 9"/>
+          <p:cNvSpPr txBox="1"/>
+          <p:nvPr/>
+        </p:nvSpPr>
+        <p:spPr>
+          <a:xfrm>
+            <a:off x="6430975" y="4114800"/>
+            <a:ext cx="4846320" cy="2011680"/>
+          </a:xfrm>
+          <a:prstGeom prst="rect">
+            <a:avLst/>
+          </a:prstGeom>
+          <a:noFill/>
+        </p:spPr>
+        <p:txBody>
+          <a:bodyPr wrap="square">
+            <a:spAutoFit/>
+          </a:bodyPr>
+          <a:lstStyle/>
+          <a:p>
+            <a:r>
+              <a:rPr sz="1600" b="1">
+                <a:solidFill>
+                  <a:srgbClr val="F59E0B"/>
+                </a:solidFill>
+              </a:rPr>
+              <a:t>Conclusión de Negocio:
+</a:t>
             </a:r>
           </a:p>
           <a:p>
             <a:pPr>
               <a:spcBef>
-                <a:spcPts val="1400"/>
+                <a:spcPts val="400"/>
               </a:spcBef>
             </a:pPr>
             <a:r>
-              <a:rPr sz="1200" b="1">
-                <a:solidFill>
-                  <a:srgbClr val="38BDF8"/>
-                </a:solidFill>
-              </a:rPr>
-              <a:t>💡 Impacto Estratégico para el Negocio:
-</a:t>
-            </a:r>
-            <a:r>
-              <a:rPr sz="1100" b="0">
-                <a:solidFill>
-                  <a:srgbClr val="94A3B8"/>
-                </a:solidFill>
-              </a:rPr>
-              <a:t>Un valor de Lift &gt; 3,3 demuestra que la combinación Pop/R&amp;B + tracción inicial triplica la probabilidad de éxito comercial en streaming frente a cualquier otro género del catálogo musical.</a:t>
+              <a:rPr sz="1350" b="0">
+                <a:solidFill>
+                  <a:srgbClr val="FFFFFF"/>
+                </a:solidFill>
+              </a:rPr>
+              <a:t>Las canciones Pop y R&amp;B que logran tracción inicial tienen el triple de probabilidad de convertirse en éxitos transversales frente al resto.</a:t>
             </a:r>
           </a:p>
         </p:txBody>
@@ -4530,7 +4766,7 @@
             <a:avLst/>
           </a:prstGeom>
           <a:solidFill>
-            <a:srgbClr val="0B0F19"/>
+            <a:srgbClr val="0A0E17"/>
           </a:solidFill>
           <a:ln>
             <a:noFill/>
@@ -4581,12 +4817,12 @@
           <a:lstStyle/>
           <a:p>
             <a:r>
-              <a:rPr sz="1000" b="1">
-                <a:solidFill>
-                  <a:srgbClr val="1DB954"/>
-                </a:solidFill>
-              </a:rPr>
-              <a:t>CRISP-DM — FASE 4 (CLUSTERING)</a:t>
+              <a:rPr sz="1100" b="1">
+                <a:solidFill>
+                  <a:srgbClr val="10B981"/>
+                </a:solidFill>
+              </a:rPr>
+              <a:t>CRISP-DM — CLUSTERING</a:t>
             </a:r>
           </a:p>
         </p:txBody>
@@ -4600,7 +4836,7 @@
         <p:spPr>
           <a:xfrm>
             <a:off x="731520" y="640080"/>
-            <a:ext cx="10698480" cy="640080"/>
+            <a:ext cx="10698480" cy="731520"/>
           </a:xfrm>
           <a:prstGeom prst="rect">
             <a:avLst/>
@@ -4614,12 +4850,12 @@
           <a:lstStyle/>
           <a:p>
             <a:r>
-              <a:rPr sz="2200" b="1">
-                <a:solidFill>
-                  <a:srgbClr val="F8FAFC"/>
-                </a:solidFill>
-              </a:rPr>
-              <a:t>Fase 4B: Segmentación de Catálogo con K-Means (K = 4)</a:t>
+              <a:rPr sz="2500" b="1">
+                <a:solidFill>
+                  <a:srgbClr val="FFFFFF"/>
+                </a:solidFill>
+              </a:rPr>
+              <a:t>Fase 4B: Segmentación de Catálogo (K-Means, K = 4)</a:t>
             </a:r>
           </a:p>
         </p:txBody>
@@ -4632,18 +4868,18 @@
         </p:nvSpPr>
         <p:spPr>
           <a:xfrm>
-            <a:off x="731520" y="1371600"/>
-            <a:ext cx="5943600" cy="4937760"/>
+            <a:off x="731520" y="1463040"/>
+            <a:ext cx="6217920" cy="4846320"/>
           </a:xfrm>
           <a:prstGeom prst="roundRect">
             <a:avLst/>
           </a:prstGeom>
           <a:solidFill>
-            <a:srgbClr val="181F2E"/>
+            <a:srgbClr val="161E2E"/>
           </a:solidFill>
-          <a:ln w="12700">
+          <a:ln w="19050">
             <a:solidFill>
-              <a:srgbClr val="263047"/>
+              <a:srgbClr val="2E3D59"/>
             </a:solidFill>
           </a:ln>
         </p:spPr>
@@ -4686,7 +4922,7 @@
         <p:spPr>
           <a:xfrm>
             <a:off x="868680" y="1691640"/>
-            <a:ext cx="5669280" cy="2180492"/>
+            <a:ext cx="5943600" cy="2286000"/>
           </a:xfrm>
           <a:prstGeom prst="rect">
             <a:avLst/>
@@ -4701,18 +4937,18 @@
         </p:nvSpPr>
         <p:spPr>
           <a:xfrm>
-            <a:off x="6858000" y="1371600"/>
-            <a:ext cx="4572000" cy="4937760"/>
+            <a:off x="7223760" y="1463040"/>
+            <a:ext cx="4206240" cy="1097280"/>
           </a:xfrm>
           <a:prstGeom prst="roundRect">
             <a:avLst/>
           </a:prstGeom>
           <a:solidFill>
-            <a:srgbClr val="181F2E"/>
+            <a:srgbClr val="161E2E"/>
           </a:solidFill>
-          <a:ln w="12700">
+          <a:ln w="19050">
             <a:solidFill>
-              <a:srgbClr val="263047"/>
+              <a:srgbClr val="38BDF8"/>
             </a:solidFill>
           </a:ln>
         </p:spPr>
@@ -4746,8 +4982,8 @@
         </p:nvSpPr>
         <p:spPr>
           <a:xfrm>
-            <a:off x="7040880" y="1554480"/>
-            <a:ext cx="4206240" cy="4572000"/>
+            <a:off x="7406640" y="1572768"/>
+            <a:ext cx="3840480" cy="868680"/>
           </a:xfrm>
           <a:prstGeom prst="rect">
             <a:avLst/>
@@ -4761,105 +4997,290 @@
           <a:lstStyle/>
           <a:p>
             <a:r>
-              <a:rPr sz="1300" b="1">
-                <a:solidFill>
-                  <a:srgbClr val="1DB954"/>
-                </a:solidFill>
-              </a:rPr>
-              <a:t>Los 4 Arquetipos Sonoros Identificados:
+              <a:rPr sz="1400" b="1">
+                <a:solidFill>
+                  <a:srgbClr val="38BDF8"/>
+                </a:solidFill>
+              </a:rPr>
+              <a:t>Clúster 0: Chill &amp; Instrumental
 </a:t>
             </a:r>
           </a:p>
           <a:p>
-            <a:pPr>
-              <a:spcBef>
-                <a:spcPts val="600"/>
-              </a:spcBef>
-            </a:pPr>
-            <a:r>
-              <a:rPr sz="1050" b="1">
-                <a:solidFill>
-                  <a:srgbClr val="F8FAFC"/>
-                </a:solidFill>
-              </a:rPr>
-              <a:t>• Cluster 0: Acústico, Instrumental &amp; Chill: </a:t>
-            </a:r>
-            <a:r>
-              <a:rPr sz="950" b="0">
-                <a:solidFill>
-                  <a:srgbClr val="94A3B8"/>
-                </a:solidFill>
-              </a:rPr>
-              <a:t>Baja energía, alta instrumentalidad. Ideal para listas de estudio, lectura y concentración.</a:t>
-            </a:r>
-          </a:p>
-          <a:p>
-            <a:pPr>
-              <a:spcBef>
-                <a:spcPts val="600"/>
-              </a:spcBef>
-            </a:pPr>
-            <a:r>
-              <a:rPr sz="1050" b="1">
-                <a:solidFill>
-                  <a:srgbClr val="F8FAFC"/>
-                </a:solidFill>
-              </a:rPr>
-              <a:t>• Cluster 1: Pop Comercial &amp; Radio FM: </a:t>
-            </a:r>
-            <a:r>
-              <a:rPr sz="950" b="0">
-                <a:solidFill>
-                  <a:srgbClr val="94A3B8"/>
-                </a:solidFill>
-              </a:rPr>
-              <a:t>Bailabilidad y energía optimizadas. Gran rotación radial, playlists de gran alcance y streaming viral.</a:t>
-            </a:r>
-          </a:p>
-          <a:p>
-            <a:pPr>
-              <a:spcBef>
-                <a:spcPts val="600"/>
-              </a:spcBef>
-            </a:pPr>
-            <a:r>
-              <a:rPr sz="1050" b="1">
-                <a:solidFill>
-                  <a:srgbClr val="F8FAFC"/>
-                </a:solidFill>
-              </a:rPr>
-              <a:t>• Cluster 2: Rock, Electrónica &amp; Alta Potencia: </a:t>
-            </a:r>
-            <a:r>
-              <a:rPr sz="950" b="0">
-                <a:solidFill>
-                  <a:srgbClr val="94A3B8"/>
-                </a:solidFill>
-              </a:rPr>
-              <a:t>Máxima energía, BPM elevado y alto loudness. Entrenamientos, playlists 'workout' y festivales.</a:t>
-            </a:r>
-          </a:p>
-          <a:p>
-            <a:pPr>
-              <a:spcBef>
-                <a:spcPts val="600"/>
-              </a:spcBef>
-            </a:pPr>
-            <a:r>
-              <a:rPr sz="1050" b="1">
-                <a:solidFill>
-                  <a:srgbClr val="F8FAFC"/>
-                </a:solidFill>
-              </a:rPr>
-              <a:t>• Cluster 3: Urbano, Trap &amp; Modern Hits: </a:t>
-            </a:r>
-            <a:r>
-              <a:rPr sz="950" b="0">
-                <a:solidFill>
-                  <a:srgbClr val="94A3B8"/>
-                </a:solidFill>
-              </a:rPr>
-              <a:t>Ritmos sincopados y letra explícita predominante. Fuerte penetración en audiencias Gen Z.</a:t>
+            <a:r>
+              <a:rPr sz="1150" b="0">
+                <a:solidFill>
+                  <a:srgbClr val="CBD5E1"/>
+                </a:solidFill>
+              </a:rPr>
+              <a:t>Baja energía, acústico. Listas de estudio y concentración.</a:t>
+            </a:r>
+          </a:p>
+        </p:txBody>
+      </p:sp>
+      <p:sp>
+        <p:nvSpPr>
+          <p:cNvPr id="9" name="Rounded Rectangle 8"/>
+          <p:cNvSpPr/>
+          <p:nvPr/>
+        </p:nvSpPr>
+        <p:spPr>
+          <a:xfrm>
+            <a:off x="7223760" y="2697480"/>
+            <a:ext cx="4206240" cy="1097280"/>
+          </a:xfrm>
+          <a:prstGeom prst="roundRect">
+            <a:avLst/>
+          </a:prstGeom>
+          <a:solidFill>
+            <a:srgbClr val="161E2E"/>
+          </a:solidFill>
+          <a:ln w="19050">
+            <a:solidFill>
+              <a:srgbClr val="10B981"/>
+            </a:solidFill>
+          </a:ln>
+        </p:spPr>
+        <p:style>
+          <a:lnRef idx="1">
+            <a:schemeClr val="accent1"/>
+          </a:lnRef>
+          <a:fillRef idx="3">
+            <a:schemeClr val="accent1"/>
+          </a:fillRef>
+          <a:effectRef idx="2">
+            <a:schemeClr val="accent1"/>
+          </a:effectRef>
+          <a:fontRef idx="minor">
+            <a:schemeClr val="lt1"/>
+          </a:fontRef>
+        </p:style>
+        <p:txBody>
+          <a:bodyPr rtlCol="0" anchor="ctr"/>
+          <a:lstStyle/>
+          <a:p>
+            <a:pPr algn="ctr"/>
+          </a:p>
+        </p:txBody>
+      </p:sp>
+      <p:sp>
+        <p:nvSpPr>
+          <p:cNvPr id="10" name="TextBox 9"/>
+          <p:cNvSpPr txBox="1"/>
+          <p:nvPr/>
+        </p:nvSpPr>
+        <p:spPr>
+          <a:xfrm>
+            <a:off x="7406640" y="2807208"/>
+            <a:ext cx="3840480" cy="868680"/>
+          </a:xfrm>
+          <a:prstGeom prst="rect">
+            <a:avLst/>
+          </a:prstGeom>
+          <a:noFill/>
+        </p:spPr>
+        <p:txBody>
+          <a:bodyPr wrap="square">
+            <a:spAutoFit/>
+          </a:bodyPr>
+          <a:lstStyle/>
+          <a:p>
+            <a:r>
+              <a:rPr sz="1400" b="1">
+                <a:solidFill>
+                  <a:srgbClr val="10B981"/>
+                </a:solidFill>
+              </a:rPr>
+              <a:t>Clúster 1: Pop Comercial
+</a:t>
+            </a:r>
+          </a:p>
+          <a:p>
+            <a:r>
+              <a:rPr sz="1150" b="0">
+                <a:solidFill>
+                  <a:srgbClr val="CBD5E1"/>
+                </a:solidFill>
+              </a:rPr>
+              <a:t>Bailabilidad y energía optimizadas. Gran rotación radial.</a:t>
+            </a:r>
+          </a:p>
+        </p:txBody>
+      </p:sp>
+      <p:sp>
+        <p:nvSpPr>
+          <p:cNvPr id="11" name="Rounded Rectangle 10"/>
+          <p:cNvSpPr/>
+          <p:nvPr/>
+        </p:nvSpPr>
+        <p:spPr>
+          <a:xfrm>
+            <a:off x="7223760" y="3931920"/>
+            <a:ext cx="4206240" cy="1097280"/>
+          </a:xfrm>
+          <a:prstGeom prst="roundRect">
+            <a:avLst/>
+          </a:prstGeom>
+          <a:solidFill>
+            <a:srgbClr val="161E2E"/>
+          </a:solidFill>
+          <a:ln w="19050">
+            <a:solidFill>
+              <a:srgbClr val="F59E0B"/>
+            </a:solidFill>
+          </a:ln>
+        </p:spPr>
+        <p:style>
+          <a:lnRef idx="1">
+            <a:schemeClr val="accent1"/>
+          </a:lnRef>
+          <a:fillRef idx="3">
+            <a:schemeClr val="accent1"/>
+          </a:fillRef>
+          <a:effectRef idx="2">
+            <a:schemeClr val="accent1"/>
+          </a:effectRef>
+          <a:fontRef idx="minor">
+            <a:schemeClr val="lt1"/>
+          </a:fontRef>
+        </p:style>
+        <p:txBody>
+          <a:bodyPr rtlCol="0" anchor="ctr"/>
+          <a:lstStyle/>
+          <a:p>
+            <a:pPr algn="ctr"/>
+          </a:p>
+        </p:txBody>
+      </p:sp>
+      <p:sp>
+        <p:nvSpPr>
+          <p:cNvPr id="12" name="TextBox 11"/>
+          <p:cNvSpPr txBox="1"/>
+          <p:nvPr/>
+        </p:nvSpPr>
+        <p:spPr>
+          <a:xfrm>
+            <a:off x="7406640" y="4041648"/>
+            <a:ext cx="3840480" cy="868680"/>
+          </a:xfrm>
+          <a:prstGeom prst="rect">
+            <a:avLst/>
+          </a:prstGeom>
+          <a:noFill/>
+        </p:spPr>
+        <p:txBody>
+          <a:bodyPr wrap="square">
+            <a:spAutoFit/>
+          </a:bodyPr>
+          <a:lstStyle/>
+          <a:p>
+            <a:r>
+              <a:rPr sz="1400" b="1">
+                <a:solidFill>
+                  <a:srgbClr val="F59E0B"/>
+                </a:solidFill>
+              </a:rPr>
+              <a:t>Clúster 2: Rock &amp; Fiesta
+</a:t>
+            </a:r>
+          </a:p>
+          <a:p>
+            <a:r>
+              <a:rPr sz="1150" b="0">
+                <a:solidFill>
+                  <a:srgbClr val="CBD5E1"/>
+                </a:solidFill>
+              </a:rPr>
+              <a:t>Alta potencia acústica y tempo elevado. Festivales y deportes.</a:t>
+            </a:r>
+          </a:p>
+        </p:txBody>
+      </p:sp>
+      <p:sp>
+        <p:nvSpPr>
+          <p:cNvPr id="13" name="Rounded Rectangle 12"/>
+          <p:cNvSpPr/>
+          <p:nvPr/>
+        </p:nvSpPr>
+        <p:spPr>
+          <a:xfrm>
+            <a:off x="7223760" y="5166360"/>
+            <a:ext cx="4206240" cy="1097280"/>
+          </a:xfrm>
+          <a:prstGeom prst="roundRect">
+            <a:avLst/>
+          </a:prstGeom>
+          <a:solidFill>
+            <a:srgbClr val="161E2E"/>
+          </a:solidFill>
+          <a:ln w="19050">
+            <a:solidFill>
+              <a:srgbClr val="A855F7"/>
+            </a:solidFill>
+          </a:ln>
+        </p:spPr>
+        <p:style>
+          <a:lnRef idx="1">
+            <a:schemeClr val="accent1"/>
+          </a:lnRef>
+          <a:fillRef idx="3">
+            <a:schemeClr val="accent1"/>
+          </a:fillRef>
+          <a:effectRef idx="2">
+            <a:schemeClr val="accent1"/>
+          </a:effectRef>
+          <a:fontRef idx="minor">
+            <a:schemeClr val="lt1"/>
+          </a:fontRef>
+        </p:style>
+        <p:txBody>
+          <a:bodyPr rtlCol="0" anchor="ctr"/>
+          <a:lstStyle/>
+          <a:p>
+            <a:pPr algn="ctr"/>
+          </a:p>
+        </p:txBody>
+      </p:sp>
+      <p:sp>
+        <p:nvSpPr>
+          <p:cNvPr id="14" name="TextBox 13"/>
+          <p:cNvSpPr txBox="1"/>
+          <p:nvPr/>
+        </p:nvSpPr>
+        <p:spPr>
+          <a:xfrm>
+            <a:off x="7406640" y="5276088"/>
+            <a:ext cx="3840480" cy="868680"/>
+          </a:xfrm>
+          <a:prstGeom prst="rect">
+            <a:avLst/>
+          </a:prstGeom>
+          <a:noFill/>
+        </p:spPr>
+        <p:txBody>
+          <a:bodyPr wrap="square">
+            <a:spAutoFit/>
+          </a:bodyPr>
+          <a:lstStyle/>
+          <a:p>
+            <a:r>
+              <a:rPr sz="1400" b="1">
+                <a:solidFill>
+                  <a:srgbClr val="A855F7"/>
+                </a:solidFill>
+              </a:rPr>
+              <a:t>Clúster 3: Urbano &amp; Explícito
+</a:t>
+            </a:r>
+          </a:p>
+          <a:p>
+            <a:r>
+              <a:rPr sz="1150" b="0">
+                <a:solidFill>
+                  <a:srgbClr val="CBD5E1"/>
+                </a:solidFill>
+              </a:rPr>
+              <a:t>Ritmo marcado y lenguaje explícito. Audiencia Gen Z.</a:t>
             </a:r>
           </a:p>
         </p:txBody>
@@ -4897,7 +5318,7 @@
             <a:avLst/>
           </a:prstGeom>
           <a:solidFill>
-            <a:srgbClr val="0B0F19"/>
+            <a:srgbClr val="0A0E17"/>
           </a:solidFill>
           <a:ln>
             <a:noFill/>
@@ -4948,12 +5369,12 @@
           <a:lstStyle/>
           <a:p>
             <a:r>
-              <a:rPr sz="1000" b="1">
-                <a:solidFill>
-                  <a:srgbClr val="1DB954"/>
-                </a:solidFill>
-              </a:rPr>
-              <a:t>CRISP-DM — FASE 4 (CLASIFICACIÓN)</a:t>
+              <a:rPr sz="1100" b="1">
+                <a:solidFill>
+                  <a:srgbClr val="10B981"/>
+                </a:solidFill>
+              </a:rPr>
+              <a:t>CRISP-DM — CLASIFICACIÓN</a:t>
             </a:r>
           </a:p>
         </p:txBody>
@@ -4967,7 +5388,7 @@
         <p:spPr>
           <a:xfrm>
             <a:off x="731520" y="640080"/>
-            <a:ext cx="10698480" cy="640080"/>
+            <a:ext cx="10698480" cy="731520"/>
           </a:xfrm>
           <a:prstGeom prst="rect">
             <a:avLst/>
@@ -4981,9 +5402,9 @@
           <a:lstStyle/>
           <a:p>
             <a:r>
-              <a:rPr sz="2200" b="1">
-                <a:solidFill>
-                  <a:srgbClr val="F8FAFC"/>
+              <a:rPr sz="2500" b="1">
+                <a:solidFill>
+                  <a:srgbClr val="FFFFFF"/>
                 </a:solidFill>
               </a:rPr>
               <a:t>Fase 4C: Clasificación de Hits con Árbol de Decisión</a:t>
@@ -4999,18 +5420,18 @@
         </p:nvSpPr>
         <p:spPr>
           <a:xfrm>
-            <a:off x="731520" y="1371600"/>
-            <a:ext cx="10728655" cy="4937760"/>
+            <a:off x="731520" y="1463040"/>
+            <a:ext cx="10728655" cy="4846320"/>
           </a:xfrm>
           <a:prstGeom prst="roundRect">
             <a:avLst/>
           </a:prstGeom>
           <a:solidFill>
-            <a:srgbClr val="181F2E"/>
+            <a:srgbClr val="161E2E"/>
           </a:solidFill>
-          <a:ln w="12700">
+          <a:ln w="19050">
             <a:solidFill>
-              <a:srgbClr val="263047"/>
+              <a:srgbClr val="2E3D59"/>
             </a:solidFill>
           </a:ln>
         </p:spPr>
@@ -5052,7 +5473,7 @@
         </p:blipFill>
         <p:spPr>
           <a:xfrm>
-            <a:off x="914400" y="1508760"/>
+            <a:off x="914400" y="1600200"/>
             <a:ext cx="10332720" cy="5166360"/>
           </a:xfrm>
           <a:prstGeom prst="rect">
@@ -5068,8 +5489,8 @@
         </p:nvSpPr>
         <p:spPr>
           <a:xfrm>
-            <a:off x="914400" y="5120640"/>
-            <a:ext cx="10332720" cy="1005840"/>
+            <a:off x="1005840" y="5212080"/>
+            <a:ext cx="10149840" cy="914400"/>
           </a:xfrm>
           <a:prstGeom prst="rect">
             <a:avLst/>
@@ -5083,20 +5504,20 @@
           <a:lstStyle/>
           <a:p>
             <a:r>
-              <a:rPr sz="1100" b="1">
-                <a:solidFill>
-                  <a:srgbClr val="1DB954"/>
-                </a:solidFill>
-              </a:rPr>
-              <a:t>Control Riguroso de Sobreajuste (Overfitting): </a:t>
-            </a:r>
-            <a:r>
-              <a:rPr sz="1050" b="0">
-                <a:solidFill>
-                  <a:srgbClr val="F8FAFC"/>
-                </a:solidFill>
-              </a:rPr>
-              <a:t>Se evaluaron profundidades de 2 a 15. Para max_depth ≥ 8 existía sobreajuste severo (Train 84% vs Test &lt; 52%). Se fijó max_depth = 3 con criterio Gini para garantizar 8 nodos hoja interpretables y alta capacidad de generalización.</a:t>
+              <a:rPr sz="1400" b="1">
+                <a:solidFill>
+                  <a:srgbClr val="10B981"/>
+                </a:solidFill>
+              </a:rPr>
+              <a:t>Control de Sobreajuste (max_depth = 3): </a:t>
+            </a:r>
+            <a:r>
+              <a:rPr sz="1300" b="0">
+                <a:solidFill>
+                  <a:srgbClr val="FFFFFF"/>
+                </a:solidFill>
+              </a:rPr>
+              <a:t>Se limitó a 3 niveles para evitar memorización (profundidades mayores provocaban overfitting de 84% train vs &lt;52% test). Entrega 8 reglas claras e interpretables para productores.</a:t>
             </a:r>
           </a:p>
         </p:txBody>
@@ -5134,7 +5555,7 @@
             <a:avLst/>
           </a:prstGeom>
           <a:solidFill>
-            <a:srgbClr val="0B0F19"/>
+            <a:srgbClr val="0A0E17"/>
           </a:solidFill>
           <a:ln>
             <a:noFill/>
@@ -5185,12 +5606,12 @@
           <a:lstStyle/>
           <a:p>
             <a:r>
-              <a:rPr sz="1000" b="1">
-                <a:solidFill>
-                  <a:srgbClr val="1DB954"/>
-                </a:solidFill>
-              </a:rPr>
-              <a:t>CRISP-DM — FASE 5 (EVALUACIÓN)</a:t>
+              <a:rPr sz="1100" b="1">
+                <a:solidFill>
+                  <a:srgbClr val="F59E0B"/>
+                </a:solidFill>
+              </a:rPr>
+              <a:t>CRISP-DM — EVALUACIÓN</a:t>
             </a:r>
           </a:p>
         </p:txBody>
@@ -5204,7 +5625,7 @@
         <p:spPr>
           <a:xfrm>
             <a:off x="731520" y="640080"/>
-            <a:ext cx="10698480" cy="640080"/>
+            <a:ext cx="10698480" cy="731520"/>
           </a:xfrm>
           <a:prstGeom prst="rect">
             <a:avLst/>
@@ -5218,12 +5639,12 @@
           <a:lstStyle/>
           <a:p>
             <a:r>
-              <a:rPr sz="2200" b="1">
-                <a:solidFill>
-                  <a:srgbClr val="F8FAFC"/>
-                </a:solidFill>
-              </a:rPr>
-              <a:t>Fase 5: Evaluación de Desempeño y Matriz de Confusión</a:t>
+              <a:rPr sz="2500" b="1">
+                <a:solidFill>
+                  <a:srgbClr val="FFFFFF"/>
+                </a:solidFill>
+              </a:rPr>
+              <a:t>Fase 5: Evaluación y Matriz de Confusión</a:t>
             </a:r>
           </a:p>
         </p:txBody>
@@ -5236,18 +5657,18 @@
         </p:nvSpPr>
         <p:spPr>
           <a:xfrm>
-            <a:off x="731520" y="1371600"/>
-            <a:ext cx="4754880" cy="4937760"/>
+            <a:off x="731520" y="1463040"/>
+            <a:ext cx="5029200" cy="4846320"/>
           </a:xfrm>
           <a:prstGeom prst="roundRect">
             <a:avLst/>
           </a:prstGeom>
           <a:solidFill>
-            <a:srgbClr val="181F2E"/>
+            <a:srgbClr val="161E2E"/>
           </a:solidFill>
-          <a:ln w="12700">
+          <a:ln w="19050">
             <a:solidFill>
-              <a:srgbClr val="263047"/>
+              <a:srgbClr val="2E3D59"/>
             </a:solidFill>
           </a:ln>
         </p:spPr>
@@ -5289,8 +5710,8 @@
         </p:blipFill>
         <p:spPr>
           <a:xfrm>
-            <a:off x="1005840" y="1645920"/>
-            <a:ext cx="4206240" cy="3235569"/>
+            <a:off x="1051560" y="1737360"/>
+            <a:ext cx="4389120" cy="3376246"/>
           </a:xfrm>
           <a:prstGeom prst="rect">
             <a:avLst/>
@@ -5305,18 +5726,18 @@
         </p:nvSpPr>
         <p:spPr>
           <a:xfrm>
-            <a:off x="5760720" y="1371600"/>
-            <a:ext cx="5669280" cy="4937760"/>
+            <a:off x="6035040" y="1463040"/>
+            <a:ext cx="5394960" cy="1417320"/>
           </a:xfrm>
           <a:prstGeom prst="roundRect">
             <a:avLst/>
           </a:prstGeom>
           <a:solidFill>
-            <a:srgbClr val="181F2E"/>
+            <a:srgbClr val="161E2E"/>
           </a:solidFill>
-          <a:ln w="12700">
+          <a:ln w="19050">
             <a:solidFill>
-              <a:srgbClr val="263047"/>
+              <a:srgbClr val="10B981"/>
             </a:solidFill>
           </a:ln>
         </p:spPr>
@@ -5350,8 +5771,8 @@
         </p:nvSpPr>
         <p:spPr>
           <a:xfrm>
-            <a:off x="5943600" y="1554480"/>
-            <a:ext cx="5303520" cy="4572000"/>
+            <a:off x="6217920" y="1645920"/>
+            <a:ext cx="5029200" cy="1051560"/>
           </a:xfrm>
           <a:prstGeom prst="rect">
             <a:avLst/>
@@ -5365,128 +5786,216 @@
           <a:lstStyle/>
           <a:p>
             <a:r>
-              <a:rPr sz="1300" b="1">
-                <a:solidFill>
-                  <a:srgbClr val="1DB954"/>
-                </a:solidFill>
-              </a:rPr>
-              <a:t>Resultados sobre 17.000 Canciones de Prueba:
+              <a:rPr sz="1600" b="1">
+                <a:solidFill>
+                  <a:srgbClr val="10B981"/>
+                </a:solidFill>
+              </a:rPr>
+              <a:t>74% Precisión en Descarte
 </a:t>
             </a:r>
           </a:p>
           <a:p>
             <a:pPr>
               <a:spcBef>
-                <a:spcPts val="600"/>
+                <a:spcPts val="400"/>
               </a:spcBef>
             </a:pPr>
             <a:r>
-              <a:rPr sz="1050" b="1">
-                <a:solidFill>
-                  <a:srgbClr val="F8FAFC"/>
-                </a:solidFill>
-              </a:rPr>
-              <a:t>• Exactitud Global (Accuracy): </a:t>
-            </a:r>
-            <a:r>
-              <a:rPr sz="1000" b="0">
-                <a:solidFill>
-                  <a:srgbClr val="94A3B8"/>
-                </a:solidFill>
-              </a:rPr>
-              <a:t>57,95% sobre el conjunto independiente de validación.</a:t>
+              <a:rPr sz="1300" b="0">
+                <a:solidFill>
+                  <a:srgbClr val="CBD5E1"/>
+                </a:solidFill>
+              </a:rPr>
+              <a:t>8.253 Verdaderos Negativos. Permite filtrar maquetas sin potencial con alta fiabilidad.</a:t>
+            </a:r>
+          </a:p>
+        </p:txBody>
+      </p:sp>
+      <p:sp>
+        <p:nvSpPr>
+          <p:cNvPr id="9" name="Rounded Rectangle 8"/>
+          <p:cNvSpPr/>
+          <p:nvPr/>
+        </p:nvSpPr>
+        <p:spPr>
+          <a:xfrm>
+            <a:off x="6035040" y="3063240"/>
+            <a:ext cx="5394960" cy="1417320"/>
+          </a:xfrm>
+          <a:prstGeom prst="roundRect">
+            <a:avLst/>
+          </a:prstGeom>
+          <a:solidFill>
+            <a:srgbClr val="161E2E"/>
+          </a:solidFill>
+          <a:ln w="19050">
+            <a:solidFill>
+              <a:srgbClr val="38BDF8"/>
+            </a:solidFill>
+          </a:ln>
+        </p:spPr>
+        <p:style>
+          <a:lnRef idx="1">
+            <a:schemeClr val="accent1"/>
+          </a:lnRef>
+          <a:fillRef idx="3">
+            <a:schemeClr val="accent1"/>
+          </a:fillRef>
+          <a:effectRef idx="2">
+            <a:schemeClr val="accent1"/>
+          </a:effectRef>
+          <a:fontRef idx="minor">
+            <a:schemeClr val="lt1"/>
+          </a:fontRef>
+        </p:style>
+        <p:txBody>
+          <a:bodyPr rtlCol="0" anchor="ctr"/>
+          <a:lstStyle/>
+          <a:p>
+            <a:pPr algn="ctr"/>
+          </a:p>
+        </p:txBody>
+      </p:sp>
+      <p:sp>
+        <p:nvSpPr>
+          <p:cNvPr id="10" name="TextBox 9"/>
+          <p:cNvSpPr txBox="1"/>
+          <p:nvPr/>
+        </p:nvSpPr>
+        <p:spPr>
+          <a:xfrm>
+            <a:off x="6217920" y="3246120"/>
+            <a:ext cx="5029200" cy="1051560"/>
+          </a:xfrm>
+          <a:prstGeom prst="rect">
+            <a:avLst/>
+          </a:prstGeom>
+          <a:noFill/>
+        </p:spPr>
+        <p:txBody>
+          <a:bodyPr wrap="square">
+            <a:spAutoFit/>
+          </a:bodyPr>
+          <a:lstStyle/>
+          <a:p>
+            <a:r>
+              <a:rPr sz="1600" b="1">
+                <a:solidFill>
+                  <a:srgbClr val="38BDF8"/>
+                </a:solidFill>
+              </a:rPr>
+              <a:t>57,95% Exactitud Global
+</a:t>
             </a:r>
           </a:p>
           <a:p>
             <a:pPr>
               <a:spcBef>
-                <a:spcPts val="600"/>
+                <a:spcPts val="400"/>
               </a:spcBef>
             </a:pPr>
             <a:r>
-              <a:rPr sz="1050" b="1">
-                <a:solidFill>
-                  <a:srgbClr val="F8FAFC"/>
-                </a:solidFill>
-              </a:rPr>
-              <a:t>• Alta Precisión en Clase Estándar: </a:t>
-            </a:r>
-            <a:r>
-              <a:rPr sz="1000" b="0">
-                <a:solidFill>
-                  <a:srgbClr val="94A3B8"/>
-                </a:solidFill>
-              </a:rPr>
-              <a:t>74% de precisión (8.253 Verdaderos Negativos), permitiendo descartar maquetas con bajo potencial con alta fiabilidad.</a:t>
+              <a:rPr sz="1300" b="0">
+                <a:solidFill>
+                  <a:srgbClr val="CBD5E1"/>
+                </a:solidFill>
+              </a:rPr>
+              <a:t>Desempeño sobre 17.000 canciones de prueba independientes.</a:t>
+            </a:r>
+          </a:p>
+        </p:txBody>
+      </p:sp>
+      <p:sp>
+        <p:nvSpPr>
+          <p:cNvPr id="11" name="Rounded Rectangle 10"/>
+          <p:cNvSpPr/>
+          <p:nvPr/>
+        </p:nvSpPr>
+        <p:spPr>
+          <a:xfrm>
+            <a:off x="6035040" y="4663440"/>
+            <a:ext cx="5394960" cy="1417320"/>
+          </a:xfrm>
+          <a:prstGeom prst="roundRect">
+            <a:avLst/>
+          </a:prstGeom>
+          <a:solidFill>
+            <a:srgbClr val="161E2E"/>
+          </a:solidFill>
+          <a:ln w="19050">
+            <a:solidFill>
+              <a:srgbClr val="F59E0B"/>
+            </a:solidFill>
+          </a:ln>
+        </p:spPr>
+        <p:style>
+          <a:lnRef idx="1">
+            <a:schemeClr val="accent1"/>
+          </a:lnRef>
+          <a:fillRef idx="3">
+            <a:schemeClr val="accent1"/>
+          </a:fillRef>
+          <a:effectRef idx="2">
+            <a:schemeClr val="accent1"/>
+          </a:effectRef>
+          <a:fontRef idx="minor">
+            <a:schemeClr val="lt1"/>
+          </a:fontRef>
+        </p:style>
+        <p:txBody>
+          <a:bodyPr rtlCol="0" anchor="ctr"/>
+          <a:lstStyle/>
+          <a:p>
+            <a:pPr algn="ctr"/>
+          </a:p>
+        </p:txBody>
+      </p:sp>
+      <p:sp>
+        <p:nvSpPr>
+          <p:cNvPr id="12" name="TextBox 11"/>
+          <p:cNvSpPr txBox="1"/>
+          <p:nvPr/>
+        </p:nvSpPr>
+        <p:spPr>
+          <a:xfrm>
+            <a:off x="6217920" y="4846320"/>
+            <a:ext cx="5029200" cy="1051560"/>
+          </a:xfrm>
+          <a:prstGeom prst="rect">
+            <a:avLst/>
+          </a:prstGeom>
+          <a:noFill/>
+        </p:spPr>
+        <p:txBody>
+          <a:bodyPr wrap="square">
+            <a:spAutoFit/>
+          </a:bodyPr>
+          <a:lstStyle/>
+          <a:p>
+            <a:r>
+              <a:rPr sz="1600" b="1">
+                <a:solidFill>
+                  <a:srgbClr val="F59E0B"/>
+                </a:solidFill>
+              </a:rPr>
+              <a:t>Límite Acústico Natural
+</a:t>
             </a:r>
           </a:p>
           <a:p>
             <a:pPr>
               <a:spcBef>
-                <a:spcPts val="600"/>
+                <a:spcPts val="400"/>
               </a:spcBef>
             </a:pPr>
             <a:r>
-              <a:rPr sz="1050" b="1">
-                <a:solidFill>
-                  <a:srgbClr val="F8FAFC"/>
-                </a:solidFill>
-              </a:rPr>
-              <a:t>• Detección de Hits Comerciales: </a:t>
-            </a:r>
-            <a:r>
-              <a:rPr sz="1000" b="0">
-                <a:solidFill>
-                  <a:srgbClr val="94A3B8"/>
-                </a:solidFill>
-              </a:rPr>
-              <a:t>1.598 Verdaderos Positivos detectados exclusivamente por acústica.</a:t>
-            </a:r>
-          </a:p>
-          <a:p>
-            <a:pPr>
-              <a:spcBef>
-                <a:spcPts val="600"/>
-              </a:spcBef>
-            </a:pPr>
-            <a:r>
-              <a:rPr sz="1050" b="1">
-                <a:solidFill>
-                  <a:srgbClr val="F8FAFC"/>
-                </a:solidFill>
-              </a:rPr>
-              <a:t>• ¿Por qué existe un límite predictivo?: </a:t>
-            </a:r>
-            <a:r>
-              <a:rPr sz="1000" b="0">
-                <a:solidFill>
-                  <a:srgbClr val="94A3B8"/>
-                </a:solidFill>
-              </a:rPr>
-              <a:t>El éxito musical es multifactorial: la inversión de marketing, la viralización en TikTok y la fama del artista determinan gran parte de la tracción final.</a:t>
-            </a:r>
-          </a:p>
-          <a:p>
-            <a:pPr>
-              <a:spcBef>
-                <a:spcPts val="600"/>
-              </a:spcBef>
-            </a:pPr>
-            <a:r>
-              <a:rPr sz="1050" b="1">
-                <a:solidFill>
-                  <a:srgbClr val="F8FAFC"/>
-                </a:solidFill>
-              </a:rPr>
-              <a:t>• Valor Práctico para la Industria: </a:t>
-            </a:r>
-            <a:r>
-              <a:rPr sz="1000" b="0">
-                <a:solidFill>
-                  <a:srgbClr val="94A3B8"/>
-                </a:solidFill>
-              </a:rPr>
-              <a:t>El modelo funciona como un filtro inteligente de precalificación (screening) para priorizar presupuestos de A&amp;R.</a:t>
+              <a:rPr sz="1300" b="0">
+                <a:solidFill>
+                  <a:srgbClr val="CBD5E1"/>
+                </a:solidFill>
+              </a:rPr>
+              <a:t>El éxito musical es multifactorial: depende además de inversión en marketing y viralización.</a:t>
             </a:r>
           </a:p>
         </p:txBody>
@@ -5524,7 +6033,7 @@
             <a:avLst/>
           </a:prstGeom>
           <a:solidFill>
-            <a:srgbClr val="0B0F19"/>
+            <a:srgbClr val="0A0E17"/>
           </a:solidFill>
           <a:ln>
             <a:noFill/>
@@ -5575,12 +6084,12 @@
           <a:lstStyle/>
           <a:p>
             <a:r>
-              <a:rPr sz="1000" b="1">
-                <a:solidFill>
-                  <a:srgbClr val="1DB954"/>
-                </a:solidFill>
-              </a:rPr>
-              <a:t>CRISP-DM — FASES 6 &amp; 7</a:t>
+              <a:rPr sz="1100" b="1">
+                <a:solidFill>
+                  <a:srgbClr val="10B981"/>
+                </a:solidFill>
+              </a:rPr>
+              <a:t>CRISP-DM — FASE 6</a:t>
             </a:r>
           </a:p>
         </p:txBody>
@@ -5594,7 +6103,7 @@
         <p:spPr>
           <a:xfrm>
             <a:off x="731520" y="640080"/>
-            <a:ext cx="10698480" cy="640080"/>
+            <a:ext cx="10698480" cy="731520"/>
           </a:xfrm>
           <a:prstGeom prst="rect">
             <a:avLst/>
@@ -5608,12 +6117,12 @@
           <a:lstStyle/>
           <a:p>
             <a:r>
-              <a:rPr sz="2200" b="1">
-                <a:solidFill>
-                  <a:srgbClr val="F8FAFC"/>
-                </a:solidFill>
-              </a:rPr>
-              <a:t>Fases 6 y 7: Conclusiones Estratégicas y Despliegue Web</a:t>
+              <a:rPr sz="2500" b="1">
+                <a:solidFill>
+                  <a:srgbClr val="FFFFFF"/>
+                </a:solidFill>
+              </a:rPr>
+              <a:t>Conclusiones y Recomendaciones de Negocio</a:t>
             </a:r>
           </a:p>
         </p:txBody>
@@ -5627,17 +6136,17 @@
         <p:spPr>
           <a:xfrm>
             <a:off x="731520" y="1463040"/>
-            <a:ext cx="5212080" cy="4754880"/>
+            <a:ext cx="3383280" cy="4846320"/>
           </a:xfrm>
           <a:prstGeom prst="roundRect">
             <a:avLst/>
           </a:prstGeom>
           <a:solidFill>
-            <a:srgbClr val="181F2E"/>
+            <a:srgbClr val="161E2E"/>
           </a:solidFill>
-          <a:ln w="12700">
+          <a:ln w="19050">
             <a:solidFill>
-              <a:srgbClr val="1DB954"/>
+              <a:srgbClr val="10B981"/>
             </a:solidFill>
           </a:ln>
         </p:spPr>
@@ -5671,8 +6180,8 @@
         </p:nvSpPr>
         <p:spPr>
           <a:xfrm>
-            <a:off x="914400" y="1645920"/>
-            <a:ext cx="4846320" cy="4389120"/>
+            <a:off x="960120" y="1691640"/>
+            <a:ext cx="2926080" cy="4389120"/>
           </a:xfrm>
           <a:prstGeom prst="rect">
             <a:avLst/>
@@ -5686,69 +6195,59 @@
           <a:lstStyle/>
           <a:p>
             <a:r>
-              <a:rPr sz="1300" b="1">
-                <a:solidFill>
-                  <a:srgbClr val="1DB954"/>
-                </a:solidFill>
-              </a:rPr>
-              <a:t>🎯 Recomendaciones de Negocio
-</a:t>
-            </a:r>
-          </a:p>
-          <a:p>
-            <a:r>
-              <a:rPr sz="1100" b="1">
-                <a:solidFill>
-                  <a:srgbClr val="F8FAFC"/>
-                </a:solidFill>
-              </a:rPr>
-              <a:t>Acciones por Clúster
+              <a:rPr sz="1600" b="1">
+                <a:solidFill>
+                  <a:srgbClr val="10B981"/>
+                </a:solidFill>
+              </a:rPr>
+              <a:t>🎯 Estrategia Pop &amp; Urbano
 </a:t>
             </a:r>
           </a:p>
           <a:p>
             <a:pPr>
               <a:spcBef>
-                <a:spcPts val="600"/>
+                <a:spcPts val="400"/>
               </a:spcBef>
             </a:pPr>
             <a:r>
-              <a:rPr sz="1050" b="0">
-                <a:solidFill>
-                  <a:srgbClr val="94A3B8"/>
-                </a:solidFill>
-              </a:rPr>
-              <a:t>• Clúster 1 (Pop): Concentrar inversión de pauta publicitaria en temas con bailabilidad &gt; 0,65 y energía &gt; 0,60.</a:t>
+              <a:rPr sz="1300" b="1">
+                <a:solidFill>
+                  <a:srgbClr val="FFFFFF"/>
+                </a:solidFill>
+              </a:rPr>
+              <a:t>Inversión en Publicidad
+</a:t>
             </a:r>
           </a:p>
           <a:p>
             <a:pPr>
               <a:spcBef>
-                <a:spcPts val="600"/>
+                <a:spcPts val="1000"/>
               </a:spcBef>
             </a:pPr>
             <a:r>
-              <a:rPr sz="1050" b="0">
-                <a:solidFill>
-                  <a:srgbClr val="94A3B8"/>
-                </a:solidFill>
-              </a:rPr>
-              <a:t>• Clúster 0 (Acústico): No gastar en radio; colocar en playlists funcionales de estudio y concentración (mayor retención).</a:t>
+              <a:rPr sz="1250" b="0">
+                <a:solidFill>
+                  <a:srgbClr val="CBD5E1"/>
+                </a:solidFill>
+              </a:rPr>
+              <a:t>✔ Concentrar pauta en canciones con bailabilidad &gt; 0.65 y energía &gt; 0.60.</a:t>
             </a:r>
           </a:p>
           <a:p>
             <a:pPr>
               <a:spcBef>
-                <a:spcPts val="600"/>
+                <a:spcPts val="1000"/>
               </a:spcBef>
             </a:pPr>
             <a:r>
-              <a:rPr sz="1050" b="0">
-                <a:solidFill>
-                  <a:srgbClr val="94A3B8"/>
-                </a:solidFill>
-              </a:rPr>
-              <a:t>• Clúster 3 (Urbano): Pauta digital vertical móvil (TikTok/Reels) para audiencias de 16 a 24 años.</a:t>
+              <a:rPr sz="1250" b="0">
+                <a:solidFill>
+                  <a:srgbClr val="CBD5E1"/>
+                </a:solidFill>
+              </a:rPr>
+              <a:t>✔ Promoción vertical en TikTok/Reels para audiencias de 16 a 24 años.</a:t>
             </a:r>
           </a:p>
         </p:txBody>
@@ -5761,16 +6260,16 @@
         </p:nvSpPr>
         <p:spPr>
           <a:xfrm>
-            <a:off x="6126480" y="1463040"/>
-            <a:ext cx="5212080" cy="4754880"/>
+            <a:off x="4389120" y="1463040"/>
+            <a:ext cx="3383280" cy="4846320"/>
           </a:xfrm>
           <a:prstGeom prst="roundRect">
             <a:avLst/>
           </a:prstGeom>
           <a:solidFill>
-            <a:srgbClr val="181F2E"/>
+            <a:srgbClr val="161E2E"/>
           </a:solidFill>
-          <a:ln w="12700">
+          <a:ln w="19050">
             <a:solidFill>
               <a:srgbClr val="38BDF8"/>
             </a:solidFill>
@@ -5806,8 +6305,8 @@
         </p:nvSpPr>
         <p:spPr>
           <a:xfrm>
-            <a:off x="6309360" y="1645920"/>
-            <a:ext cx="4846320" cy="4389120"/>
+            <a:off x="4617720" y="1691640"/>
+            <a:ext cx="2926080" cy="4389120"/>
           </a:xfrm>
           <a:prstGeom prst="rect">
             <a:avLst/>
@@ -5821,84 +6320,184 @@
           <a:lstStyle/>
           <a:p>
             <a:r>
-              <a:rPr sz="1300" b="1">
+              <a:rPr sz="1600" b="1">
                 <a:solidFill>
                   <a:srgbClr val="38BDF8"/>
                 </a:solidFill>
               </a:rPr>
-              <a:t>🚀 Despliegue y Entrega Completa
-</a:t>
-            </a:r>
-          </a:p>
-          <a:p>
-            <a:r>
-              <a:rPr sz="1100" b="1">
-                <a:solidFill>
-                  <a:srgbClr val="F8FAFC"/>
-                </a:solidFill>
-              </a:rPr>
-              <a:t>Producto Funcional
+              <a:t>🧘 Estrategia Acústica / Chill
 </a:t>
             </a:r>
           </a:p>
           <a:p>
             <a:pPr>
               <a:spcBef>
-                <a:spcPts val="600"/>
+                <a:spcPts val="400"/>
               </a:spcBef>
             </a:pPr>
             <a:r>
-              <a:rPr sz="1050" b="0">
-                <a:solidFill>
-                  <a:srgbClr val="94A3B8"/>
-                </a:solidFill>
-              </a:rPr>
-              <a:t>• Aplicación web interactiva en FastAPI y Bootstrap 5 Dark.</a:t>
+              <a:rPr sz="1300" b="1">
+                <a:solidFill>
+                  <a:srgbClr val="FFFFFF"/>
+                </a:solidFill>
+              </a:rPr>
+              <a:t>Listas Funcionales
+</a:t>
             </a:r>
           </a:p>
           <a:p>
             <a:pPr>
               <a:spcBef>
-                <a:spcPts val="600"/>
+                <a:spcPts val="1000"/>
               </a:spcBef>
             </a:pPr>
             <a:r>
-              <a:rPr sz="1050" b="0">
-                <a:solidFill>
-                  <a:srgbClr val="94A3B8"/>
-                </a:solidFill>
-              </a:rPr>
-              <a:t>• Persistencia relacional con SQLite y suite de 17 pruebas unitarias.</a:t>
+              <a:rPr sz="1250" b="0">
+                <a:solidFill>
+                  <a:srgbClr val="CBD5E1"/>
+                </a:solidFill>
+              </a:rPr>
+              <a:t>✔ Evitar costosas campañas de radio comercial.</a:t>
             </a:r>
           </a:p>
           <a:p>
             <a:pPr>
               <a:spcBef>
-                <a:spcPts val="600"/>
+                <a:spcPts val="1000"/>
               </a:spcBef>
             </a:pPr>
             <a:r>
-              <a:rPr sz="1050" b="0">
-                <a:solidFill>
-                  <a:srgbClr val="94A3B8"/>
-                </a:solidFill>
-              </a:rPr>
-              <a:t>• Repositorio sincronizado en GitHub con historial de trabajo colaborativo.</a:t>
+              <a:rPr sz="1250" b="0">
+                <a:solidFill>
+                  <a:srgbClr val="CBD5E1"/>
+                </a:solidFill>
+              </a:rPr>
+              <a:t>✔ Posicionar en playlists de estudio, concentración y sueño (mayor retención).</a:t>
+            </a:r>
+          </a:p>
+        </p:txBody>
+      </p:sp>
+      <p:sp>
+        <p:nvSpPr>
+          <p:cNvPr id="9" name="Rounded Rectangle 8"/>
+          <p:cNvSpPr/>
+          <p:nvPr/>
+        </p:nvSpPr>
+        <p:spPr>
+          <a:xfrm>
+            <a:off x="8046720" y="1463040"/>
+            <a:ext cx="3383280" cy="4846320"/>
+          </a:xfrm>
+          <a:prstGeom prst="roundRect">
+            <a:avLst/>
+          </a:prstGeom>
+          <a:solidFill>
+            <a:srgbClr val="161E2E"/>
+          </a:solidFill>
+          <a:ln w="19050">
+            <a:solidFill>
+              <a:srgbClr val="A855F7"/>
+            </a:solidFill>
+          </a:ln>
+        </p:spPr>
+        <p:style>
+          <a:lnRef idx="1">
+            <a:schemeClr val="accent1"/>
+          </a:lnRef>
+          <a:fillRef idx="3">
+            <a:schemeClr val="accent1"/>
+          </a:fillRef>
+          <a:effectRef idx="2">
+            <a:schemeClr val="accent1"/>
+          </a:effectRef>
+          <a:fontRef idx="minor">
+            <a:schemeClr val="lt1"/>
+          </a:fontRef>
+        </p:style>
+        <p:txBody>
+          <a:bodyPr rtlCol="0" anchor="ctr"/>
+          <a:lstStyle/>
+          <a:p>
+            <a:pPr algn="ctr"/>
+          </a:p>
+        </p:txBody>
+      </p:sp>
+      <p:sp>
+        <p:nvSpPr>
+          <p:cNvPr id="10" name="TextBox 9"/>
+          <p:cNvSpPr txBox="1"/>
+          <p:nvPr/>
+        </p:nvSpPr>
+        <p:spPr>
+          <a:xfrm>
+            <a:off x="8275320" y="1691640"/>
+            <a:ext cx="2926080" cy="4389120"/>
+          </a:xfrm>
+          <a:prstGeom prst="rect">
+            <a:avLst/>
+          </a:prstGeom>
+          <a:noFill/>
+        </p:spPr>
+        <p:txBody>
+          <a:bodyPr wrap="square">
+            <a:spAutoFit/>
+          </a:bodyPr>
+          <a:lstStyle/>
+          <a:p>
+            <a:r>
+              <a:rPr sz="1600" b="1">
+                <a:solidFill>
+                  <a:srgbClr val="A855F7"/>
+                </a:solidFill>
+              </a:rPr>
+              <a:t>🚀 De Datos a Producto Web
+</a:t>
             </a:r>
           </a:p>
           <a:p>
             <a:pPr>
               <a:spcBef>
-                <a:spcPts val="600"/>
+                <a:spcPts val="400"/>
               </a:spcBef>
             </a:pPr>
             <a:r>
-              <a:rPr sz="1050" b="0">
-                <a:solidFill>
-                  <a:srgbClr val="94A3B8"/>
-                </a:solidFill>
-              </a:rPr>
-              <a:t>• Informe técnico completo de 5 a 8 páginas y diapositivas de defensa.</a:t>
+              <a:rPr sz="1300" b="1">
+                <a:solidFill>
+                  <a:srgbClr val="FFFFFF"/>
+                </a:solidFill>
+              </a:rPr>
+              <a:t>Entrega Completa
+</a:t>
+            </a:r>
+          </a:p>
+          <a:p>
+            <a:pPr>
+              <a:spcBef>
+                <a:spcPts val="1000"/>
+              </a:spcBef>
+            </a:pPr>
+            <a:r>
+              <a:rPr sz="1250" b="0">
+                <a:solidFill>
+                  <a:srgbClr val="CBD5E1"/>
+                </a:solidFill>
+              </a:rPr>
+              <a:t>✔ Plataforma web interactiva con backend FastAPI y persistencia SQLite.</a:t>
+            </a:r>
+          </a:p>
+          <a:p>
+            <a:pPr>
+              <a:spcBef>
+                <a:spcPts val="1000"/>
+              </a:spcBef>
+            </a:pPr>
+            <a:r>
+              <a:rPr sz="1250" b="0">
+                <a:solidFill>
+                  <a:srgbClr val="CBD5E1"/>
+                </a:solidFill>
+              </a:rPr>
+              <a:t>✔ 17 pruebas unitarias aprobadas y código listo para producción en la nube.</a:t>
             </a:r>
           </a:p>
         </p:txBody>
